--- a/reports/wilor_training_reproduction_summary/WiLoR_论文代码差异与本机训练复盘.pptx
+++ b/reports/wilor_training_reproduction_summary/WiLoR_论文代码差异与本机训练复盘.pptx
@@ -36,6 +36,14 @@
     <p:sldId id="284" r:id="rId36"/>
     <p:sldId id="285" r:id="rId37"/>
     <p:sldId id="286" r:id="rId38"/>
+    <p:sldId id="287" r:id="rId39"/>
+    <p:sldId id="288" r:id="rId40"/>
+    <p:sldId id="289" r:id="rId41"/>
+    <p:sldId id="290" r:id="rId42"/>
+    <p:sldId id="291" r:id="rId43"/>
+    <p:sldId id="292" r:id="rId44"/>
+    <p:sldId id="293" r:id="rId45"/>
+    <p:sldId id="294" r:id="rId46"/>
   </p:sldIdLst>
   <p:sldSz cx="12191695" cy="6858000" type="screen4x3"/>
   <p:notesSz cx="6858000" cy="9144000"/>
@@ -2736,6 +2744,846 @@
           <a:p>
             <a:r>
               <a:t>/data/xjiang390/projects/WiLoR/logs/train/runs/wilor_four_dataset_2gpu_50epoch_20261015T200534Z</a:t>
+            </a:r>
+          </a:p>
+        </p:txBody>
+      </p:sp>
+      <p:sp>
+        <p:nvSpPr>
+          <p:cNvPr id="4" name="Slide Number Placeholder 3"/>
+          <p:cNvSpPr>
+            <a:spLocks noGrp="1"/>
+          </p:cNvSpPr>
+          <p:nvPr>
+            <p:ph type="sldNum" idx="5" sz="quarter"/>
+          </p:nvPr>
+        </p:nvSpPr>
+        <p:spPr/>
+      </p:sp>
+    </p:spTree>
+  </p:cSld>
+  <p:clrMapOvr>
+    <a:masterClrMapping/>
+  </p:clrMapOvr>
+</p:notes>
+</file>
+
+<file path=ppt/notesSlides/notesSlide32.xml><?xml version="1.0" encoding="utf-8"?>
+<p:notes xmlns:a="http://schemas.openxmlformats.org/drawingml/2006/main" xmlns:p="http://schemas.openxmlformats.org/presentationml/2006/main" xmlns:r="http://schemas.openxmlformats.org/officeDocument/2006/relationships">
+  <p:cSld>
+    <p:spTree>
+      <p:nvGrpSpPr>
+        <p:cNvPr id="1" name=""/>
+        <p:cNvGrpSpPr/>
+        <p:nvPr/>
+      </p:nvGrpSpPr>
+      <p:grpSpPr>
+        <a:xfrm>
+          <a:off x="0" y="0"/>
+          <a:ext cx="0" cy="0"/>
+          <a:chOff x="0" y="0"/>
+          <a:chExt cx="0" cy="0"/>
+        </a:xfrm>
+      </p:grpSpPr>
+      <p:sp>
+        <p:nvSpPr>
+          <p:cNvPr id="2" name="Slide Image Placeholder 1"/>
+          <p:cNvSpPr>
+            <a:spLocks noGrp="1"/>
+          </p:cNvSpPr>
+          <p:nvPr>
+            <p:ph type="sldImg" idx="2"/>
+          </p:nvPr>
+        </p:nvSpPr>
+        <p:spPr/>
+      </p:sp>
+      <p:sp>
+        <p:nvSpPr>
+          <p:cNvPr id="3" name="Notes Placeholder 2"/>
+          <p:cNvSpPr>
+            <a:spLocks noGrp="1"/>
+          </p:cNvSpPr>
+          <p:nvPr>
+            <p:ph type="body" idx="3" sz="quarter"/>
+          </p:nvPr>
+        </p:nvSpPr>
+        <p:spPr/>
+        <p:txBody>
+          <a:bodyPr/>
+          <a:lstStyle/>
+          <a:p>
+            <a:r>
+              <a:t>核验时间：2026-10-15 18:46 EDT</a:t>
+            </a:r>
+          </a:p>
+          <a:p>
+            <a:r>
+              <a:t>两次均为FreiHAND-only。原计划1000轮不等于实际完成量；本次比较使用第50轮停止时的checkpoint。</a:t>
+            </a:r>
+          </a:p>
+          <a:p>
+            <a:r>
+              <a:t>证据路径：</a:t>
+            </a:r>
+          </a:p>
+          <a:p>
+            <a:r>
+              <a:t>两次运行的model_config.yaml；slide_content.json；progress_update.json</a:t>
+            </a:r>
+          </a:p>
+        </p:txBody>
+      </p:sp>
+      <p:sp>
+        <p:nvSpPr>
+          <p:cNvPr id="4" name="Slide Number Placeholder 3"/>
+          <p:cNvSpPr>
+            <a:spLocks noGrp="1"/>
+          </p:cNvSpPr>
+          <p:nvPr>
+            <p:ph type="sldNum" idx="5" sz="quarter"/>
+          </p:nvPr>
+        </p:nvSpPr>
+        <p:spPr/>
+      </p:sp>
+    </p:spTree>
+  </p:cSld>
+  <p:clrMapOvr>
+    <a:masterClrMapping/>
+  </p:clrMapOvr>
+</p:notes>
+</file>
+
+<file path=ppt/notesSlides/notesSlide33.xml><?xml version="1.0" encoding="utf-8"?>
+<p:notes xmlns:a="http://schemas.openxmlformats.org/drawingml/2006/main" xmlns:p="http://schemas.openxmlformats.org/presentationml/2006/main" xmlns:r="http://schemas.openxmlformats.org/officeDocument/2006/relationships">
+  <p:cSld>
+    <p:spTree>
+      <p:nvGrpSpPr>
+        <p:cNvPr id="1" name=""/>
+        <p:cNvGrpSpPr/>
+        <p:nvPr/>
+      </p:nvGrpSpPr>
+      <p:grpSpPr>
+        <a:xfrm>
+          <a:off x="0" y="0"/>
+          <a:ext cx="0" cy="0"/>
+          <a:chOff x="0" y="0"/>
+          <a:chExt cx="0" cy="0"/>
+        </a:xfrm>
+      </p:grpSpPr>
+      <p:sp>
+        <p:nvSpPr>
+          <p:cNvPr id="2" name="Slide Image Placeholder 1"/>
+          <p:cNvSpPr>
+            <a:spLocks noGrp="1"/>
+          </p:cNvSpPr>
+          <p:nvPr>
+            <p:ph type="sldImg" idx="2"/>
+          </p:nvPr>
+        </p:nvSpPr>
+        <p:spPr/>
+      </p:sp>
+      <p:sp>
+        <p:nvSpPr>
+          <p:cNvPr id="3" name="Notes Placeholder 2"/>
+          <p:cNvSpPr>
+            <a:spLocks noGrp="1"/>
+          </p:cNvSpPr>
+          <p:nvPr>
+            <p:ph type="body" idx="3" sz="quarter"/>
+          </p:nvPr>
+        </p:nvSpPr>
+        <p:spPr/>
+        <p:txBody>
+          <a:bodyPr/>
+          <a:lstStyle/>
+          <a:p>
+            <a:r>
+              <a:t>核验时间：2026-10-15 18:46 EDT</a:t>
+            </a:r>
+          </a:p>
+          <a:p>
+            <a:r>
+              <a:t>本次正式配置未启用单pose token、弱透视或顶点loss。监督项与对抗项的相对尺度改变，原始loss不可直接横比。</a:t>
+            </a:r>
+          </a:p>
+          <a:p>
+            <a:r>
+              <a:t>证据路径：</a:t>
+            </a:r>
+          </a:p>
+          <a:p>
+            <a:r>
+              <a:t>wilor/models/wilor.py；两次model_config.yaml；训练复盘的已核验记录</a:t>
+            </a:r>
+          </a:p>
+        </p:txBody>
+      </p:sp>
+      <p:sp>
+        <p:nvSpPr>
+          <p:cNvPr id="4" name="Slide Number Placeholder 3"/>
+          <p:cNvSpPr>
+            <a:spLocks noGrp="1"/>
+          </p:cNvSpPr>
+          <p:nvPr>
+            <p:ph type="sldNum" idx="5" sz="quarter"/>
+          </p:nvPr>
+        </p:nvSpPr>
+        <p:spPr/>
+      </p:sp>
+    </p:spTree>
+  </p:cSld>
+  <p:clrMapOvr>
+    <a:masterClrMapping/>
+  </p:clrMapOvr>
+</p:notes>
+</file>
+
+<file path=ppt/notesSlides/notesSlide34.xml><?xml version="1.0" encoding="utf-8"?>
+<p:notes xmlns:a="http://schemas.openxmlformats.org/drawingml/2006/main" xmlns:p="http://schemas.openxmlformats.org/presentationml/2006/main" xmlns:r="http://schemas.openxmlformats.org/officeDocument/2006/relationships">
+  <p:cSld>
+    <p:spTree>
+      <p:nvGrpSpPr>
+        <p:cNvPr id="1" name=""/>
+        <p:cNvGrpSpPr/>
+        <p:nvPr/>
+      </p:nvGrpSpPr>
+      <p:grpSpPr>
+        <a:xfrm>
+          <a:off x="0" y="0"/>
+          <a:ext cx="0" cy="0"/>
+          <a:chOff x="0" y="0"/>
+          <a:chExt cx="0" cy="0"/>
+        </a:xfrm>
+      </p:grpSpPr>
+      <p:sp>
+        <p:nvSpPr>
+          <p:cNvPr id="2" name="Slide Image Placeholder 1"/>
+          <p:cNvSpPr>
+            <a:spLocks noGrp="1"/>
+          </p:cNvSpPr>
+          <p:nvPr>
+            <p:ph type="sldImg" idx="2"/>
+          </p:nvPr>
+        </p:nvSpPr>
+        <p:spPr/>
+      </p:sp>
+      <p:sp>
+        <p:nvSpPr>
+          <p:cNvPr id="3" name="Notes Placeholder 2"/>
+          <p:cNvSpPr>
+            <a:spLocks noGrp="1"/>
+          </p:cNvSpPr>
+          <p:nvPr>
+            <p:ph type="body" idx="3" sz="quarter"/>
+          </p:nvPr>
+        </p:nvSpPr>
+        <p:spPr/>
+        <p:txBody>
+          <a:bodyPr/>
+          <a:lstStyle/>
+          <a:p>
+            <a:r>
+              <a:t>核验时间：2026-10-15 18:46 EDT</a:t>
+            </a:r>
+          </a:p>
+          <a:p>
+            <a:r>
+              <a:t>同一3960张官方评测图、裁剪元数据、FP32、无增强；PA-MPJPE增加18.3%。两个固定checkpoint，未用测试集选模。</a:t>
+            </a:r>
+          </a:p>
+          <a:p>
+            <a:r>
+              <a:t>证据路径：</a:t>
+            </a:r>
+          </a:p>
+          <a:p>
+            <a:r>
+              <a:t>evaluation/selftrained_vs_freihand_epoch50/{comparison,provenance}.json</a:t>
+            </a:r>
+          </a:p>
+        </p:txBody>
+      </p:sp>
+      <p:sp>
+        <p:nvSpPr>
+          <p:cNvPr id="4" name="Slide Number Placeholder 3"/>
+          <p:cNvSpPr>
+            <a:spLocks noGrp="1"/>
+          </p:cNvSpPr>
+          <p:nvPr>
+            <p:ph type="sldNum" idx="5" sz="quarter"/>
+          </p:nvPr>
+        </p:nvSpPr>
+        <p:spPr/>
+      </p:sp>
+    </p:spTree>
+  </p:cSld>
+  <p:clrMapOvr>
+    <a:masterClrMapping/>
+  </p:clrMapOvr>
+</p:notes>
+</file>
+
+<file path=ppt/notesSlides/notesSlide35.xml><?xml version="1.0" encoding="utf-8"?>
+<p:notes xmlns:a="http://schemas.openxmlformats.org/drawingml/2006/main" xmlns:p="http://schemas.openxmlformats.org/presentationml/2006/main" xmlns:r="http://schemas.openxmlformats.org/officeDocument/2006/relationships">
+  <p:cSld>
+    <p:spTree>
+      <p:nvGrpSpPr>
+        <p:cNvPr id="1" name=""/>
+        <p:cNvGrpSpPr/>
+        <p:nvPr/>
+      </p:nvGrpSpPr>
+      <p:grpSpPr>
+        <a:xfrm>
+          <a:off x="0" y="0"/>
+          <a:ext cx="0" cy="0"/>
+          <a:chOff x="0" y="0"/>
+          <a:chExt cx="0" cy="0"/>
+        </a:xfrm>
+      </p:grpSpPr>
+      <p:sp>
+        <p:nvSpPr>
+          <p:cNvPr id="2" name="Slide Image Placeholder 1"/>
+          <p:cNvSpPr>
+            <a:spLocks noGrp="1"/>
+          </p:cNvSpPr>
+          <p:nvPr>
+            <p:ph type="sldImg" idx="2"/>
+          </p:nvPr>
+        </p:nvSpPr>
+        <p:spPr/>
+      </p:sp>
+      <p:sp>
+        <p:nvSpPr>
+          <p:cNvPr id="3" name="Notes Placeholder 2"/>
+          <p:cNvSpPr>
+            <a:spLocks noGrp="1"/>
+          </p:cNvSpPr>
+          <p:nvPr>
+            <p:ph type="body" idx="3" sz="quarter"/>
+          </p:nvPr>
+        </p:nvSpPr>
+        <p:spPr/>
+        <p:txBody>
+          <a:bodyPr/>
+          <a:lstStyle/>
+          <a:p>
+            <a:r>
+              <a:t>核验时间：2026-10-15 18:46 EDT</a:t>
+            </a:r>
+          </a:p>
+          <a:p>
+            <a:r>
+              <a:t>继续训练能否超过旧模型尚未验证。多项条件同时变化，本次对比不是单变量消融实验。</a:t>
+            </a:r>
+          </a:p>
+          <a:p>
+            <a:r>
+              <a:t>证据路径：</a:t>
+            </a:r>
+          </a:p>
+          <a:p>
+            <a:r>
+              <a:t>同口径comparison.json；reports/stopped_freihand_epoch50/metrics.json</a:t>
+            </a:r>
+          </a:p>
+        </p:txBody>
+      </p:sp>
+      <p:sp>
+        <p:nvSpPr>
+          <p:cNvPr id="4" name="Slide Number Placeholder 3"/>
+          <p:cNvSpPr>
+            <a:spLocks noGrp="1"/>
+          </p:cNvSpPr>
+          <p:nvPr>
+            <p:ph type="sldNum" idx="5" sz="quarter"/>
+          </p:nvPr>
+        </p:nvSpPr>
+        <p:spPr/>
+      </p:sp>
+    </p:spTree>
+  </p:cSld>
+  <p:clrMapOvr>
+    <a:masterClrMapping/>
+  </p:clrMapOvr>
+</p:notes>
+</file>
+
+<file path=ppt/notesSlides/notesSlide36.xml><?xml version="1.0" encoding="utf-8"?>
+<p:notes xmlns:a="http://schemas.openxmlformats.org/drawingml/2006/main" xmlns:p="http://schemas.openxmlformats.org/presentationml/2006/main" xmlns:r="http://schemas.openxmlformats.org/officeDocument/2006/relationships">
+  <p:cSld>
+    <p:spTree>
+      <p:nvGrpSpPr>
+        <p:cNvPr id="1" name=""/>
+        <p:cNvGrpSpPr/>
+        <p:nvPr/>
+      </p:nvGrpSpPr>
+      <p:grpSpPr>
+        <a:xfrm>
+          <a:off x="0" y="0"/>
+          <a:ext cx="0" cy="0"/>
+          <a:chOff x="0" y="0"/>
+          <a:chExt cx="0" cy="0"/>
+        </a:xfrm>
+      </p:grpSpPr>
+      <p:sp>
+        <p:nvSpPr>
+          <p:cNvPr id="2" name="Slide Image Placeholder 1"/>
+          <p:cNvSpPr>
+            <a:spLocks noGrp="1"/>
+          </p:cNvSpPr>
+          <p:nvPr>
+            <p:ph type="sldImg" idx="2"/>
+          </p:nvPr>
+        </p:nvSpPr>
+        <p:spPr/>
+      </p:sp>
+      <p:sp>
+        <p:nvSpPr>
+          <p:cNvPr id="3" name="Notes Placeholder 2"/>
+          <p:cNvSpPr>
+            <a:spLocks noGrp="1"/>
+          </p:cNvSpPr>
+          <p:nvPr>
+            <p:ph type="body" idx="3" sz="quarter"/>
+          </p:nvPr>
+        </p:nvSpPr>
+        <p:spPr/>
+        <p:txBody>
+          <a:bodyPr/>
+          <a:lstStyle/>
+          <a:p>
+            <a:r>
+              <a:t>{</a:t>
+            </a:r>
+          </a:p>
+          <a:p>
+            <a:r>
+              <a:t>  "evidence": "evaluation/ego_clinical_official_baseline/",</a:t>
+            </a:r>
+          </a:p>
+          <a:p>
+            <a:r>
+              <a:t>  "checkpoint_sha256": "3e97aafc7dd08d883a4cc5a027df61fdb6fda6136dbd1319405413862ada6bb2",</a:t>
+            </a:r>
+          </a:p>
+          <a:p>
+            <a:r>
+              <a:t>  "validation_npz_sha256": "cd296cfcf6b3651830437954b55e4d86ee69ee8ce515a38cda012ab5e27cfbc0",</a:t>
+            </a:r>
+          </a:p>
+          <a:p>
+            <a:r>
+              <a:t>  "protocol": {</a:t>
+            </a:r>
+          </a:p>
+          <a:p>
+            <a:r>
+              <a:t>    "mpjpe": "Mean over all 21 joints after wrist translation alignment, mm. No rotation or scale alignment.",</a:t>
+            </a:r>
+          </a:p>
+          <a:p>
+            <a:r>
+              <a:t>    "pa_mpjpe": "Per-sample similarity Procrustes alignment with proper rotation, positive scale and translation, then mean over 21 joints, mm.",</a:t>
+            </a:r>
+          </a:p>
+          <a:p>
+            <a:r>
+              <a:t>    "reprojection": "Mean over in-frame reference joints in 256px crop.",</a:t>
+            </a:r>
+          </a:p>
+          <a:p>
+            <a:r>
+              <a:t>    "crop": "Reference MANO-derived box, padding 1.25, rescale_factor=1, no augmentation; left canonicalized by existing loader.",</a:t>
+            </a:r>
+          </a:p>
+          <a:p>
+            <a:r>
+              <a:t>    "limits": "Reference-based hand reconstruction, not end-to-end detection. Reference keypoints are fitted MANO, not independent ground truth. Left model asymmetry remains. Test split not evaluated."</a:t>
+            </a:r>
+          </a:p>
+          <a:p>
+            <a:r>
+              <a:t>  }</a:t>
+            </a:r>
+          </a:p>
+          <a:p>
+            <a:r>
+              <a:t>}</a:t>
+            </a:r>
+          </a:p>
+        </p:txBody>
+      </p:sp>
+      <p:sp>
+        <p:nvSpPr>
+          <p:cNvPr id="4" name="Slide Number Placeholder 3"/>
+          <p:cNvSpPr>
+            <a:spLocks noGrp="1"/>
+          </p:cNvSpPr>
+          <p:nvPr>
+            <p:ph type="sldNum" idx="5" sz="quarter"/>
+          </p:nvPr>
+        </p:nvSpPr>
+        <p:spPr/>
+      </p:sp>
+    </p:spTree>
+  </p:cSld>
+  <p:clrMapOvr>
+    <a:masterClrMapping/>
+  </p:clrMapOvr>
+</p:notes>
+</file>
+
+<file path=ppt/notesSlides/notesSlide37.xml><?xml version="1.0" encoding="utf-8"?>
+<p:notes xmlns:a="http://schemas.openxmlformats.org/drawingml/2006/main" xmlns:p="http://schemas.openxmlformats.org/presentationml/2006/main" xmlns:r="http://schemas.openxmlformats.org/officeDocument/2006/relationships">
+  <p:cSld>
+    <p:spTree>
+      <p:nvGrpSpPr>
+        <p:cNvPr id="1" name=""/>
+        <p:cNvGrpSpPr/>
+        <p:nvPr/>
+      </p:nvGrpSpPr>
+      <p:grpSpPr>
+        <a:xfrm>
+          <a:off x="0" y="0"/>
+          <a:ext cx="0" cy="0"/>
+          <a:chOff x="0" y="0"/>
+          <a:chExt cx="0" cy="0"/>
+        </a:xfrm>
+      </p:grpSpPr>
+      <p:sp>
+        <p:nvSpPr>
+          <p:cNvPr id="2" name="Slide Image Placeholder 1"/>
+          <p:cNvSpPr>
+            <a:spLocks noGrp="1"/>
+          </p:cNvSpPr>
+          <p:nvPr>
+            <p:ph type="sldImg" idx="2"/>
+          </p:nvPr>
+        </p:nvSpPr>
+        <p:spPr/>
+      </p:sp>
+      <p:sp>
+        <p:nvSpPr>
+          <p:cNvPr id="3" name="Notes Placeholder 2"/>
+          <p:cNvSpPr>
+            <a:spLocks noGrp="1"/>
+          </p:cNvSpPr>
+          <p:nvPr>
+            <p:ph type="body" idx="3" sz="quarter"/>
+          </p:nvPr>
+        </p:nvSpPr>
+        <p:spPr/>
+        <p:txBody>
+          <a:bodyPr/>
+          <a:lstStyle/>
+          <a:p>
+            <a:r>
+              <a:t>{</a:t>
+            </a:r>
+          </a:p>
+          <a:p>
+            <a:r>
+              <a:t>  "evidence": "evaluation/ego_clinical_official_baseline/",</a:t>
+            </a:r>
+          </a:p>
+          <a:p>
+            <a:r>
+              <a:t>  "checkpoint_sha256": "3e97aafc7dd08d883a4cc5a027df61fdb6fda6136dbd1319405413862ada6bb2",</a:t>
+            </a:r>
+          </a:p>
+          <a:p>
+            <a:r>
+              <a:t>  "validation_npz_sha256": "cd296cfcf6b3651830437954b55e4d86ee69ee8ce515a38cda012ab5e27cfbc0",</a:t>
+            </a:r>
+          </a:p>
+          <a:p>
+            <a:r>
+              <a:t>  "protocol": {</a:t>
+            </a:r>
+          </a:p>
+          <a:p>
+            <a:r>
+              <a:t>    "mpjpe": "Mean over all 21 joints after wrist translation alignment, mm. No rotation or scale alignment.",</a:t>
+            </a:r>
+          </a:p>
+          <a:p>
+            <a:r>
+              <a:t>    "pa_mpjpe": "Per-sample similarity Procrustes alignment with proper rotation, positive scale and translation, then mean over 21 joints, mm.",</a:t>
+            </a:r>
+          </a:p>
+          <a:p>
+            <a:r>
+              <a:t>    "reprojection": "Mean over in-frame reference joints in 256px crop.",</a:t>
+            </a:r>
+          </a:p>
+          <a:p>
+            <a:r>
+              <a:t>    "crop": "Reference MANO-derived box, padding 1.25, rescale_factor=1, no augmentation; left canonicalized by existing loader.",</a:t>
+            </a:r>
+          </a:p>
+          <a:p>
+            <a:r>
+              <a:t>    "limits": "Reference-based hand reconstruction, not end-to-end detection. Reference keypoints are fitted MANO, not independent ground truth. Left model asymmetry remains. Test split not evaluated."</a:t>
+            </a:r>
+          </a:p>
+          <a:p>
+            <a:r>
+              <a:t>  }</a:t>
+            </a:r>
+          </a:p>
+          <a:p>
+            <a:r>
+              <a:t>}</a:t>
+            </a:r>
+          </a:p>
+        </p:txBody>
+      </p:sp>
+      <p:sp>
+        <p:nvSpPr>
+          <p:cNvPr id="4" name="Slide Number Placeholder 3"/>
+          <p:cNvSpPr>
+            <a:spLocks noGrp="1"/>
+          </p:cNvSpPr>
+          <p:nvPr>
+            <p:ph type="sldNum" idx="5" sz="quarter"/>
+          </p:nvPr>
+        </p:nvSpPr>
+        <p:spPr/>
+      </p:sp>
+    </p:spTree>
+  </p:cSld>
+  <p:clrMapOvr>
+    <a:masterClrMapping/>
+  </p:clrMapOvr>
+</p:notes>
+</file>
+
+<file path=ppt/notesSlides/notesSlide38.xml><?xml version="1.0" encoding="utf-8"?>
+<p:notes xmlns:a="http://schemas.openxmlformats.org/drawingml/2006/main" xmlns:p="http://schemas.openxmlformats.org/presentationml/2006/main" xmlns:r="http://schemas.openxmlformats.org/officeDocument/2006/relationships">
+  <p:cSld>
+    <p:spTree>
+      <p:nvGrpSpPr>
+        <p:cNvPr id="1" name=""/>
+        <p:cNvGrpSpPr/>
+        <p:nvPr/>
+      </p:nvGrpSpPr>
+      <p:grpSpPr>
+        <a:xfrm>
+          <a:off x="0" y="0"/>
+          <a:ext cx="0" cy="0"/>
+          <a:chOff x="0" y="0"/>
+          <a:chExt cx="0" cy="0"/>
+        </a:xfrm>
+      </p:grpSpPr>
+      <p:sp>
+        <p:nvSpPr>
+          <p:cNvPr id="2" name="Slide Image Placeholder 1"/>
+          <p:cNvSpPr>
+            <a:spLocks noGrp="1"/>
+          </p:cNvSpPr>
+          <p:nvPr>
+            <p:ph type="sldImg" idx="2"/>
+          </p:nvPr>
+        </p:nvSpPr>
+        <p:spPr/>
+      </p:sp>
+      <p:sp>
+        <p:nvSpPr>
+          <p:cNvPr id="3" name="Notes Placeholder 2"/>
+          <p:cNvSpPr>
+            <a:spLocks noGrp="1"/>
+          </p:cNvSpPr>
+          <p:nvPr>
+            <p:ph type="body" idx="3" sz="quarter"/>
+          </p:nvPr>
+        </p:nvSpPr>
+        <p:spPr/>
+        <p:txBody>
+          <a:bodyPr/>
+          <a:lstStyle/>
+          <a:p>
+            <a:r>
+              <a:t>{</a:t>
+            </a:r>
+          </a:p>
+          <a:p>
+            <a:r>
+              <a:t>  "evidence": "evaluation/ego_clinical_official_baseline/",</a:t>
+            </a:r>
+          </a:p>
+          <a:p>
+            <a:r>
+              <a:t>  "checkpoint_sha256": "3e97aafc7dd08d883a4cc5a027df61fdb6fda6136dbd1319405413862ada6bb2",</a:t>
+            </a:r>
+          </a:p>
+          <a:p>
+            <a:r>
+              <a:t>  "validation_npz_sha256": "cd296cfcf6b3651830437954b55e4d86ee69ee8ce515a38cda012ab5e27cfbc0",</a:t>
+            </a:r>
+          </a:p>
+          <a:p>
+            <a:r>
+              <a:t>  "protocol": {</a:t>
+            </a:r>
+          </a:p>
+          <a:p>
+            <a:r>
+              <a:t>    "mpjpe": "Mean over all 21 joints after wrist translation alignment, mm. No rotation or scale alignment.",</a:t>
+            </a:r>
+          </a:p>
+          <a:p>
+            <a:r>
+              <a:t>    "pa_mpjpe": "Per-sample similarity Procrustes alignment with proper rotation, positive scale and translation, then mean over 21 joints, mm.",</a:t>
+            </a:r>
+          </a:p>
+          <a:p>
+            <a:r>
+              <a:t>    "reprojection": "Mean over in-frame reference joints in 256px crop.",</a:t>
+            </a:r>
+          </a:p>
+          <a:p>
+            <a:r>
+              <a:t>    "crop": "Reference MANO-derived box, padding 1.25, rescale_factor=1, no augmentation; left canonicalized by existing loader.",</a:t>
+            </a:r>
+          </a:p>
+          <a:p>
+            <a:r>
+              <a:t>    "limits": "Reference-based hand reconstruction, not end-to-end detection. Reference keypoints are fitted MANO, not independent ground truth. Left model asymmetry remains. Test split not evaluated."</a:t>
+            </a:r>
+          </a:p>
+          <a:p>
+            <a:r>
+              <a:t>  }</a:t>
+            </a:r>
+          </a:p>
+          <a:p>
+            <a:r>
+              <a:t>}</a:t>
+            </a:r>
+          </a:p>
+        </p:txBody>
+      </p:sp>
+      <p:sp>
+        <p:nvSpPr>
+          <p:cNvPr id="4" name="Slide Number Placeholder 3"/>
+          <p:cNvSpPr>
+            <a:spLocks noGrp="1"/>
+          </p:cNvSpPr>
+          <p:nvPr>
+            <p:ph type="sldNum" idx="5" sz="quarter"/>
+          </p:nvPr>
+        </p:nvSpPr>
+        <p:spPr/>
+      </p:sp>
+    </p:spTree>
+  </p:cSld>
+  <p:clrMapOvr>
+    <a:masterClrMapping/>
+  </p:clrMapOvr>
+</p:notes>
+</file>
+
+<file path=ppt/notesSlides/notesSlide39.xml><?xml version="1.0" encoding="utf-8"?>
+<p:notes xmlns:a="http://schemas.openxmlformats.org/drawingml/2006/main" xmlns:p="http://schemas.openxmlformats.org/presentationml/2006/main" xmlns:r="http://schemas.openxmlformats.org/officeDocument/2006/relationships">
+  <p:cSld>
+    <p:spTree>
+      <p:nvGrpSpPr>
+        <p:cNvPr id="1" name=""/>
+        <p:cNvGrpSpPr/>
+        <p:nvPr/>
+      </p:nvGrpSpPr>
+      <p:grpSpPr>
+        <a:xfrm>
+          <a:off x="0" y="0"/>
+          <a:ext cx="0" cy="0"/>
+          <a:chOff x="0" y="0"/>
+          <a:chExt cx="0" cy="0"/>
+        </a:xfrm>
+      </p:grpSpPr>
+      <p:sp>
+        <p:nvSpPr>
+          <p:cNvPr id="2" name="Slide Image Placeholder 1"/>
+          <p:cNvSpPr>
+            <a:spLocks noGrp="1"/>
+          </p:cNvSpPr>
+          <p:nvPr>
+            <p:ph type="sldImg" idx="2"/>
+          </p:nvPr>
+        </p:nvSpPr>
+        <p:spPr/>
+      </p:sp>
+      <p:sp>
+        <p:nvSpPr>
+          <p:cNvPr id="3" name="Notes Placeholder 2"/>
+          <p:cNvSpPr>
+            <a:spLocks noGrp="1"/>
+          </p:cNvSpPr>
+          <p:nvPr>
+            <p:ph type="body" idx="3" sz="quarter"/>
+          </p:nvPr>
+        </p:nvSpPr>
+        <p:spPr/>
+        <p:txBody>
+          <a:bodyPr/>
+          <a:lstStyle/>
+          <a:p>
+            <a:r>
+              <a:t>{</a:t>
+            </a:r>
+          </a:p>
+          <a:p>
+            <a:r>
+              <a:t>  "evidence": "evaluation/ego_clinical_official_baseline/",</a:t>
+            </a:r>
+          </a:p>
+          <a:p>
+            <a:r>
+              <a:t>  "checkpoint_sha256": "3e97aafc7dd08d883a4cc5a027df61fdb6fda6136dbd1319405413862ada6bb2",</a:t>
+            </a:r>
+          </a:p>
+          <a:p>
+            <a:r>
+              <a:t>  "validation_npz_sha256": "cd296cfcf6b3651830437954b55e4d86ee69ee8ce515a38cda012ab5e27cfbc0",</a:t>
+            </a:r>
+          </a:p>
+          <a:p>
+            <a:r>
+              <a:t>  "protocol": {</a:t>
+            </a:r>
+          </a:p>
+          <a:p>
+            <a:r>
+              <a:t>    "mpjpe": "Mean over all 21 joints after wrist translation alignment, mm. No rotation or scale alignment.",</a:t>
+            </a:r>
+          </a:p>
+          <a:p>
+            <a:r>
+              <a:t>    "pa_mpjpe": "Per-sample similarity Procrustes alignment with proper rotation, positive scale and translation, then mean over 21 joints, mm.",</a:t>
+            </a:r>
+          </a:p>
+          <a:p>
+            <a:r>
+              <a:t>    "reprojection": "Mean over in-frame reference joints in 256px crop.",</a:t>
+            </a:r>
+          </a:p>
+          <a:p>
+            <a:r>
+              <a:t>    "crop": "Reference MANO-derived box, padding 1.25, rescale_factor=1, no augmentation; left canonicalized by existing loader.",</a:t>
+            </a:r>
+          </a:p>
+          <a:p>
+            <a:r>
+              <a:t>    "limits": "Reference-based hand reconstruction, not end-to-end detection. Reference keypoints are fitted MANO, not independent ground truth. Left model asymmetry remains. Test split not evaluated."</a:t>
+            </a:r>
+          </a:p>
+          <a:p>
+            <a:r>
+              <a:t>  }</a:t>
+            </a:r>
+          </a:p>
+          <a:p>
+            <a:r>
+              <a:t>}</a:t>
             </a:r>
           </a:p>
         </p:txBody>
@@ -24836,6 +25684,4453 @@
             </a:pPr>
             <a:r>
               <a:t>31</a:t>
+            </a:r>
+          </a:p>
+        </p:txBody>
+      </p:sp>
+    </p:spTree>
+  </p:cSld>
+  <p:clrMapOvr>
+    <a:masterClrMapping/>
+  </p:clrMapOvr>
+</p:sld>
+</file>
+
+<file path=ppt/slides/slide32.xml><?xml version="1.0" encoding="utf-8"?>
+<p:sld xmlns:a="http://schemas.openxmlformats.org/drawingml/2006/main" xmlns:p="http://schemas.openxmlformats.org/presentationml/2006/main" xmlns:r="http://schemas.openxmlformats.org/officeDocument/2006/relationships">
+  <p:cSld>
+    <p:bg>
+      <p:bgPr>
+        <a:solidFill>
+          <a:srgbClr val="F4F7FB"/>
+        </a:solidFill>
+        <a:effectLst/>
+      </p:bgPr>
+    </p:bg>
+    <p:spTree>
+      <p:nvGrpSpPr>
+        <p:cNvPr id="1" name=""/>
+        <p:cNvGrpSpPr/>
+        <p:nvPr/>
+      </p:nvGrpSpPr>
+      <p:grpSpPr/>
+      <p:sp>
+        <p:nvSpPr>
+          <p:cNvPr id="2" name="TextBox 1"/>
+          <p:cNvSpPr txBox="1"/>
+          <p:nvPr/>
+        </p:nvSpPr>
+        <p:spPr>
+          <a:xfrm>
+            <a:off x="457200" y="228600"/>
+            <a:ext cx="11247120" cy="502920"/>
+          </a:xfrm>
+          <a:prstGeom prst="rect">
+            <a:avLst/>
+          </a:prstGeom>
+          <a:noFill/>
+        </p:spPr>
+        <p:txBody>
+          <a:bodyPr wrap="square" lIns="0" rIns="0" tIns="0" bIns="0">
+            <a:spAutoFit/>
+          </a:bodyPr>
+          <a:lstStyle/>
+          <a:p>
+            <a:pPr>
+              <a:defRPr sz="2800" b="1">
+                <a:solidFill>
+                  <a:srgbClr val="17263D"/>
+                </a:solidFill>
+                <a:latin typeface="Microsoft YaHei"/>
+              </a:defRPr>
+            </a:pPr>
+            <a:r>
+              <a:t>Self-trained vs 本次 FreiHAND：训练设置</a:t>
+            </a:r>
+          </a:p>
+        </p:txBody>
+      </p:sp>
+      <p:sp>
+        <p:nvSpPr>
+          <p:cNvPr id="3" name="TextBox 2"/>
+          <p:cNvSpPr txBox="1"/>
+          <p:nvPr/>
+        </p:nvSpPr>
+        <p:spPr>
+          <a:xfrm>
+            <a:off x="457200" y="868680"/>
+            <a:ext cx="11247120" cy="411480"/>
+          </a:xfrm>
+          <a:prstGeom prst="rect">
+            <a:avLst/>
+          </a:prstGeom>
+          <a:noFill/>
+        </p:spPr>
+        <p:txBody>
+          <a:bodyPr wrap="square" lIns="0" rIns="0" tIns="0" bIns="0">
+            <a:spAutoFit/>
+          </a:bodyPr>
+          <a:lstStyle/>
+          <a:p>
+            <a:pPr>
+              <a:defRPr sz="1500" b="0">
+                <a:solidFill>
+                  <a:srgbClr val="52637A"/>
+                </a:solidFill>
+                <a:latin typeface="Microsoft YaHei"/>
+              </a:defRPr>
+            </a:pPr>
+            <a:r>
+              <a:t>本机实际运行记录｜更新于 2026-10-15 18:46 EDT</a:t>
+            </a:r>
+          </a:p>
+        </p:txBody>
+      </p:sp>
+      <p:graphicFrame>
+        <p:nvGraphicFramePr>
+          <p:cNvPr id="4" name="Table 3"/>
+          <p:cNvGraphicFramePr>
+            <a:graphicFrameLocks noGrp="1"/>
+          </p:cNvGraphicFramePr>
+          <p:nvPr/>
+        </p:nvGraphicFramePr>
+        <p:xfrm>
+          <a:off x="457200" y="1508760"/>
+          <a:ext cx="11274552" cy="4434837"/>
+        </p:xfrm>
+        <a:graphic>
+          <a:graphicData uri="http://schemas.openxmlformats.org/drawingml/2006/table">
+            <a:tbl>
+              <a:tblPr firstRow="1" bandRow="1">
+                <a:tableStyleId>{5C22544A-7EE6-4342-B048-85BDC9FD1C3A}</a:tableStyleId>
+              </a:tblPr>
+              <a:tblGrid>
+                <a:gridCol w="3758184"/>
+                <a:gridCol w="3758184"/>
+                <a:gridCol w="3758184"/>
+              </a:tblGrid>
+              <a:tr h="530352">
+                <a:tc>
+                  <a:txBody>
+                    <a:bodyPr/>
+                    <a:lstStyle/>
+                    <a:p>
+                      <a:pPr>
+                        <a:defRPr sz="1700" b="1">
+                          <a:solidFill>
+                            <a:srgbClr val="FFFFFF"/>
+                          </a:solidFill>
+                          <a:latin typeface="Microsoft YaHei"/>
+                        </a:defRPr>
+                      </a:pPr>
+                      <a:r>
+                        <a:t>项目</a:t>
+                      </a:r>
+                    </a:p>
+                  </a:txBody>
+                  <a:tcPr marL="118872" marR="118872" marT="91440" marB="54864">
+                    <a:solidFill>
+                      <a:srgbClr val="007E87"/>
+                    </a:solidFill>
+                  </a:tcPr>
+                </a:tc>
+                <a:tc>
+                  <a:txBody>
+                    <a:bodyPr/>
+                    <a:lstStyle/>
+                    <a:p>
+                      <a:pPr>
+                        <a:defRPr sz="1700" b="1">
+                          <a:solidFill>
+                            <a:srgbClr val="FFFFFF"/>
+                          </a:solidFill>
+                          <a:latin typeface="Microsoft YaHei"/>
+                        </a:defRPr>
+                      </a:pPr>
+                      <a:r>
+                        <a:t>之前 self-trained</a:t>
+                      </a:r>
+                    </a:p>
+                  </a:txBody>
+                  <a:tcPr marL="118872" marR="118872" marT="91440" marB="54864">
+                    <a:solidFill>
+                      <a:srgbClr val="007E87"/>
+                    </a:solidFill>
+                  </a:tcPr>
+                </a:tc>
+                <a:tc>
+                  <a:txBody>
+                    <a:bodyPr/>
+                    <a:lstStyle/>
+                    <a:p>
+                      <a:pPr>
+                        <a:defRPr sz="1700" b="1">
+                          <a:solidFill>
+                            <a:srgbClr val="FFFFFF"/>
+                          </a:solidFill>
+                          <a:latin typeface="Microsoft YaHei"/>
+                        </a:defRPr>
+                      </a:pPr>
+                      <a:r>
+                        <a:t>本次 FreiHAND 第50轮</a:t>
+                      </a:r>
+                    </a:p>
+                  </a:txBody>
+                  <a:tcPr marL="118872" marR="118872" marT="91440" marB="54864">
+                    <a:solidFill>
+                      <a:srgbClr val="007E87"/>
+                    </a:solidFill>
+                  </a:tcPr>
+                </a:tc>
+              </a:tr>
+              <a:tr h="780897">
+                <a:tc>
+                  <a:txBody>
+                    <a:bodyPr/>
+                    <a:lstStyle/>
+                    <a:p>
+                      <a:pPr>
+                        <a:defRPr sz="1700" b="0">
+                          <a:solidFill>
+                            <a:srgbClr val="17263D"/>
+                          </a:solidFill>
+                          <a:latin typeface="Microsoft YaHei"/>
+                        </a:defRPr>
+                      </a:pPr>
+                      <a:r>
+                        <a:t>数据 / 初始化</a:t>
+                      </a:r>
+                    </a:p>
+                  </a:txBody>
+                  <a:tcPr marL="118872" marR="118872" marT="91440" marB="54864">
+                    <a:solidFill>
+                      <a:srgbClr val="FFFFFF"/>
+                    </a:solidFill>
+                  </a:tcPr>
+                </a:tc>
+                <a:tc>
+                  <a:txBody>
+                    <a:bodyPr/>
+                    <a:lstStyle/>
+                    <a:p>
+                      <a:pPr>
+                        <a:defRPr sz="1700" b="0">
+                          <a:solidFill>
+                            <a:srgbClr val="17263D"/>
+                          </a:solidFill>
+                          <a:latin typeface="Microsoft YaHei"/>
+                        </a:defRPr>
+                      </a:pPr>
+                      <a:r>
+                        <a:t>FreiHAND-only；ViTPose预训练</a:t>
+                      </a:r>
+                    </a:p>
+                  </a:txBody>
+                  <a:tcPr marL="118872" marR="118872" marT="91440" marB="54864">
+                    <a:solidFill>
+                      <a:srgbClr val="FFFFFF"/>
+                    </a:solidFill>
+                  </a:tcPr>
+                </a:tc>
+                <a:tc>
+                  <a:txBody>
+                    <a:bodyPr/>
+                    <a:lstStyle/>
+                    <a:p>
+                      <a:pPr>
+                        <a:defRPr sz="1700" b="0">
+                          <a:solidFill>
+                            <a:srgbClr val="17263D"/>
+                          </a:solidFill>
+                          <a:latin typeface="Microsoft YaHei"/>
+                        </a:defRPr>
+                      </a:pPr>
+                      <a:r>
+                        <a:t>相同；不是续训旧checkpoint</a:t>
+                      </a:r>
+                    </a:p>
+                  </a:txBody>
+                  <a:tcPr marL="118872" marR="118872" marT="91440" marB="54864">
+                    <a:solidFill>
+                      <a:srgbClr val="FFFFFF"/>
+                    </a:solidFill>
+                  </a:tcPr>
+                </a:tc>
+              </a:tr>
+              <a:tr h="780897">
+                <a:tc>
+                  <a:txBody>
+                    <a:bodyPr/>
+                    <a:lstStyle/>
+                    <a:p>
+                      <a:pPr>
+                        <a:defRPr sz="1700" b="0">
+                          <a:solidFill>
+                            <a:srgbClr val="17263D"/>
+                          </a:solidFill>
+                          <a:latin typeface="Microsoft YaHei"/>
+                        </a:defRPr>
+                      </a:pPr>
+                      <a:r>
+                        <a:t>GPU / 总batch / 精度</a:t>
+                      </a:r>
+                    </a:p>
+                  </a:txBody>
+                  <a:tcPr marL="118872" marR="118872" marT="91440" marB="54864">
+                    <a:solidFill>
+                      <a:srgbClr val="E8EEF5"/>
+                    </a:solidFill>
+                  </a:tcPr>
+                </a:tc>
+                <a:tc>
+                  <a:txBody>
+                    <a:bodyPr/>
+                    <a:lstStyle/>
+                    <a:p>
+                      <a:pPr>
+                        <a:defRPr sz="1700" b="0">
+                          <a:solidFill>
+                            <a:srgbClr val="17263D"/>
+                          </a:solidFill>
+                          <a:latin typeface="Microsoft YaHei"/>
+                        </a:defRPr>
+                      </a:pPr>
+                      <a:r>
+                        <a:t>3 × 8 = 24；FP16混合精度</a:t>
+                      </a:r>
+                    </a:p>
+                  </a:txBody>
+                  <a:tcPr marL="118872" marR="118872" marT="91440" marB="54864">
+                    <a:solidFill>
+                      <a:srgbClr val="E8EEF5"/>
+                    </a:solidFill>
+                  </a:tcPr>
+                </a:tc>
+                <a:tc>
+                  <a:txBody>
+                    <a:bodyPr/>
+                    <a:lstStyle/>
+                    <a:p>
+                      <a:pPr>
+                        <a:defRPr sz="1700" b="0">
+                          <a:solidFill>
+                            <a:srgbClr val="17263D"/>
+                          </a:solidFill>
+                          <a:latin typeface="Microsoft YaHei"/>
+                        </a:defRPr>
+                      </a:pPr>
+                      <a:r>
+                        <a:t>2 × 512 = 1024；FP32</a:t>
+                      </a:r>
+                    </a:p>
+                  </a:txBody>
+                  <a:tcPr marL="118872" marR="118872" marT="91440" marB="54864">
+                    <a:solidFill>
+                      <a:srgbClr val="E8EEF5"/>
+                    </a:solidFill>
+                  </a:tcPr>
+                </a:tc>
+              </a:tr>
+              <a:tr h="780897">
+                <a:tc>
+                  <a:txBody>
+                    <a:bodyPr/>
+                    <a:lstStyle/>
+                    <a:p>
+                      <a:pPr>
+                        <a:defRPr sz="1700" b="0">
+                          <a:solidFill>
+                            <a:srgbClr val="17263D"/>
+                          </a:solidFill>
+                          <a:latin typeface="Microsoft YaHei"/>
+                        </a:defRPr>
+                      </a:pPr>
+                      <a:r>
+                        <a:t>实际生成器更新</a:t>
+                      </a:r>
+                    </a:p>
+                  </a:txBody>
+                  <a:tcPr marL="118872" marR="118872" marT="91440" marB="54864">
+                    <a:solidFill>
+                      <a:srgbClr val="FFFFFF"/>
+                    </a:solidFill>
+                  </a:tcPr>
+                </a:tc>
+                <a:tc>
+                  <a:txBody>
+                    <a:bodyPr/>
+                    <a:lstStyle/>
+                    <a:p>
+                      <a:pPr>
+                        <a:defRPr sz="1700" b="0">
+                          <a:solidFill>
+                            <a:srgbClr val="17263D"/>
+                          </a:solidFill>
+                          <a:latin typeface="Microsoft YaHei"/>
+                        </a:defRPr>
+                      </a:pPr>
+                      <a:r>
+                        <a:t>49,948次；global step为100,000</a:t>
+                      </a:r>
+                    </a:p>
+                  </a:txBody>
+                  <a:tcPr marL="118872" marR="118872" marT="91440" marB="54864">
+                    <a:solidFill>
+                      <a:srgbClr val="FFFFFF"/>
+                    </a:solidFill>
+                  </a:tcPr>
+                </a:tc>
+                <a:tc>
+                  <a:txBody>
+                    <a:bodyPr/>
+                    <a:lstStyle/>
+                    <a:p>
+                      <a:pPr>
+                        <a:defRPr sz="1700" b="0">
+                          <a:solidFill>
+                            <a:srgbClr val="17263D"/>
+                          </a:solidFill>
+                          <a:latin typeface="Microsoft YaHei"/>
+                        </a:defRPr>
+                      </a:pPr>
+                      <a:r>
+                        <a:t>5,700次；50 × 114</a:t>
+                      </a:r>
+                    </a:p>
+                  </a:txBody>
+                  <a:tcPr marL="118872" marR="118872" marT="91440" marB="54864">
+                    <a:solidFill>
+                      <a:srgbClr val="FFFFFF"/>
+                    </a:solidFill>
+                  </a:tcPr>
+                </a:tc>
+              </a:tr>
+              <a:tr h="780897">
+                <a:tc>
+                  <a:txBody>
+                    <a:bodyPr/>
+                    <a:lstStyle/>
+                    <a:p>
+                      <a:pPr>
+                        <a:defRPr sz="1700" b="0">
+                          <a:solidFill>
+                            <a:srgbClr val="17263D"/>
+                          </a:solidFill>
+                          <a:latin typeface="Microsoft YaHei"/>
+                        </a:defRPr>
+                      </a:pPr>
+                      <a:r>
+                        <a:t>划分 / 遍历</a:t>
+                      </a:r>
+                    </a:p>
+                  </a:txBody>
+                  <a:tcPr marL="118872" marR="118872" marT="91440" marB="54864">
+                    <a:solidFill>
+                      <a:srgbClr val="E8EEF5"/>
+                    </a:solidFill>
+                  </a:tcPr>
+                </a:tc>
+                <a:tc>
+                  <a:txBody>
+                    <a:bodyPr/>
+                    <a:lstStyle/>
+                    <a:p>
+                      <a:pPr>
+                        <a:defRPr sz="1700" b="0">
+                          <a:solidFill>
+                            <a:srgbClr val="17263D"/>
+                          </a:solidFill>
+                          <a:latin typeface="Microsoft YaHei"/>
+                        </a:defRPr>
+                      </a:pPr>
+                      <a:r>
+                        <a:t>按tar分片划分；流式采样</a:t>
+                      </a:r>
+                    </a:p>
+                  </a:txBody>
+                  <a:tcPr marL="118872" marR="118872" marT="91440" marB="54864">
+                    <a:solidFill>
+                      <a:srgbClr val="E8EEF5"/>
+                    </a:solidFill>
+                  </a:tcPr>
+                </a:tc>
+                <a:tc>
+                  <a:txBody>
+                    <a:bodyPr/>
+                    <a:lstStyle/>
+                    <a:p>
+                      <a:pPr>
+                        <a:defRPr sz="1700" b="0">
+                          <a:solidFill>
+                            <a:srgbClr val="17263D"/>
+                          </a:solidFill>
+                          <a:latin typeface="Microsoft YaHei"/>
+                        </a:defRPr>
+                      </a:pPr>
+                      <a:r>
+                        <a:t>按拍摄ID分组；有限epoch</a:t>
+                      </a:r>
+                    </a:p>
+                  </a:txBody>
+                  <a:tcPr marL="118872" marR="118872" marT="91440" marB="54864">
+                    <a:solidFill>
+                      <a:srgbClr val="E8EEF5"/>
+                    </a:solidFill>
+                  </a:tcPr>
+                </a:tc>
+              </a:tr>
+              <a:tr h="780897">
+                <a:tc>
+                  <a:txBody>
+                    <a:bodyPr/>
+                    <a:lstStyle/>
+                    <a:p>
+                      <a:pPr>
+                        <a:defRPr sz="1700" b="0">
+                          <a:solidFill>
+                            <a:srgbClr val="17263D"/>
+                          </a:solidFill>
+                          <a:latin typeface="Microsoft YaHei"/>
+                        </a:defRPr>
+                      </a:pPr>
+                      <a:r>
+                        <a:t>内部验证</a:t>
+                      </a:r>
+                    </a:p>
+                  </a:txBody>
+                  <a:tcPr marL="118872" marR="118872" marT="91440" marB="54864">
+                    <a:solidFill>
+                      <a:srgbClr val="FFFFFF"/>
+                    </a:solidFill>
+                  </a:tcPr>
+                </a:tc>
+                <a:tc>
+                  <a:txBody>
+                    <a:bodyPr/>
+                    <a:lstStyle/>
+                    <a:p>
+                      <a:pPr>
+                        <a:defRPr sz="1700" b="0">
+                          <a:solidFill>
+                            <a:srgbClr val="17263D"/>
+                          </a:solidFill>
+                          <a:latin typeface="Microsoft YaHei"/>
+                        </a:defRPr>
+                      </a:pPr>
+                      <a:r>
+                        <a:t>每1000个训练batch；仅1个验证batch</a:t>
+                      </a:r>
+                    </a:p>
+                  </a:txBody>
+                  <a:tcPr marL="118872" marR="118872" marT="91440" marB="54864">
+                    <a:solidFill>
+                      <a:srgbClr val="FFFFFF"/>
+                    </a:solidFill>
+                  </a:tcPr>
+                </a:tc>
+                <a:tc>
+                  <a:txBody>
+                    <a:bodyPr/>
+                    <a:lstStyle/>
+                    <a:p>
+                      <a:pPr>
+                        <a:defRPr sz="1700" b="0">
+                          <a:solidFill>
+                            <a:srgbClr val="17263D"/>
+                          </a:solidFill>
+                          <a:latin typeface="Microsoft YaHei"/>
+                        </a:defRPr>
+                      </a:pPr>
+                      <a:r>
+                        <a:t>每轮完整验证13,024张</a:t>
+                      </a:r>
+                    </a:p>
+                  </a:txBody>
+                  <a:tcPr marL="118872" marR="118872" marT="91440" marB="54864">
+                    <a:solidFill>
+                      <a:srgbClr val="FFFFFF"/>
+                    </a:solidFill>
+                  </a:tcPr>
+                </a:tc>
+              </a:tr>
+            </a:tbl>
+          </a:graphicData>
+        </a:graphic>
+      </p:graphicFrame>
+      <p:sp>
+        <p:nvSpPr>
+          <p:cNvPr id="5" name="TextBox 4"/>
+          <p:cNvSpPr txBox="1"/>
+          <p:nvPr/>
+        </p:nvSpPr>
+        <p:spPr>
+          <a:xfrm>
+            <a:off x="457200" y="6053328"/>
+            <a:ext cx="11247120" cy="402336"/>
+          </a:xfrm>
+          <a:prstGeom prst="rect">
+            <a:avLst/>
+          </a:prstGeom>
+          <a:noFill/>
+        </p:spPr>
+        <p:txBody>
+          <a:bodyPr wrap="square" lIns="0" rIns="0" tIns="0" bIns="0">
+            <a:spAutoFit/>
+          </a:bodyPr>
+          <a:lstStyle/>
+          <a:p>
+            <a:pPr>
+              <a:defRPr sz="1200" b="0">
+                <a:solidFill>
+                  <a:srgbClr val="52637A"/>
+                </a:solidFill>
+                <a:latin typeface="Microsoft YaHei"/>
+              </a:defRPr>
+            </a:pPr>
+            <a:r>
+              <a:t>两次均为FreiHAND-only。原计划1000轮不等于实际完成量；本次比较使用第50轮停止时的checkpoint。</a:t>
+            </a:r>
+          </a:p>
+        </p:txBody>
+      </p:sp>
+      <p:sp>
+        <p:nvSpPr>
+          <p:cNvPr id="6" name="TextBox 5"/>
+          <p:cNvSpPr txBox="1"/>
+          <p:nvPr/>
+        </p:nvSpPr>
+        <p:spPr>
+          <a:xfrm>
+            <a:off x="457200" y="6492240"/>
+            <a:ext cx="10789920" cy="210312"/>
+          </a:xfrm>
+          <a:prstGeom prst="rect">
+            <a:avLst/>
+          </a:prstGeom>
+          <a:noFill/>
+        </p:spPr>
+        <p:txBody>
+          <a:bodyPr wrap="square" lIns="0" rIns="0" tIns="0" bIns="0">
+            <a:spAutoFit/>
+          </a:bodyPr>
+          <a:lstStyle/>
+          <a:p>
+            <a:pPr>
+              <a:defRPr sz="1000" b="0">
+                <a:solidFill>
+                  <a:srgbClr val="007E87"/>
+                </a:solidFill>
+                <a:latin typeface="Microsoft YaHei"/>
+              </a:defRPr>
+            </a:pPr>
+            <a:r>
+              <a:t>来源：两次运行的model_config.yaml；slide_content.json；progress_update.json</a:t>
+            </a:r>
+          </a:p>
+        </p:txBody>
+      </p:sp>
+      <p:sp>
+        <p:nvSpPr>
+          <p:cNvPr id="7" name="TextBox 6"/>
+          <p:cNvSpPr txBox="1"/>
+          <p:nvPr/>
+        </p:nvSpPr>
+        <p:spPr>
+          <a:xfrm>
+            <a:off x="11247120" y="6464808"/>
+            <a:ext cx="457200" cy="274320"/>
+          </a:xfrm>
+          <a:prstGeom prst="rect">
+            <a:avLst/>
+          </a:prstGeom>
+          <a:noFill/>
+        </p:spPr>
+        <p:txBody>
+          <a:bodyPr wrap="square" lIns="0" rIns="0" tIns="0" bIns="0">
+            <a:spAutoFit/>
+          </a:bodyPr>
+          <a:lstStyle/>
+          <a:p>
+            <a:pPr>
+              <a:defRPr sz="1100" b="0">
+                <a:solidFill>
+                  <a:srgbClr val="52637A"/>
+                </a:solidFill>
+                <a:latin typeface="Microsoft YaHei"/>
+              </a:defRPr>
+            </a:pPr>
+            <a:r>
+              <a:t>32</a:t>
+            </a:r>
+          </a:p>
+        </p:txBody>
+      </p:sp>
+    </p:spTree>
+  </p:cSld>
+  <p:clrMapOvr>
+    <a:masterClrMapping/>
+  </p:clrMapOvr>
+</p:sld>
+</file>
+
+<file path=ppt/slides/slide33.xml><?xml version="1.0" encoding="utf-8"?>
+<p:sld xmlns:a="http://schemas.openxmlformats.org/drawingml/2006/main" xmlns:p="http://schemas.openxmlformats.org/presentationml/2006/main" xmlns:r="http://schemas.openxmlformats.org/officeDocument/2006/relationships">
+  <p:cSld>
+    <p:bg>
+      <p:bgPr>
+        <a:solidFill>
+          <a:srgbClr val="F4F7FB"/>
+        </a:solidFill>
+        <a:effectLst/>
+      </p:bgPr>
+    </p:bg>
+    <p:spTree>
+      <p:nvGrpSpPr>
+        <p:cNvPr id="1" name=""/>
+        <p:cNvGrpSpPr/>
+        <p:nvPr/>
+      </p:nvGrpSpPr>
+      <p:grpSpPr/>
+      <p:sp>
+        <p:nvSpPr>
+          <p:cNvPr id="2" name="TextBox 1"/>
+          <p:cNvSpPr txBox="1"/>
+          <p:nvPr/>
+        </p:nvSpPr>
+        <p:spPr>
+          <a:xfrm>
+            <a:off x="457200" y="228600"/>
+            <a:ext cx="11247120" cy="502920"/>
+          </a:xfrm>
+          <a:prstGeom prst="rect">
+            <a:avLst/>
+          </a:prstGeom>
+          <a:noFill/>
+        </p:spPr>
+        <p:txBody>
+          <a:bodyPr wrap="square" lIns="0" rIns="0" tIns="0" bIns="0">
+            <a:spAutoFit/>
+          </a:bodyPr>
+          <a:lstStyle/>
+          <a:p>
+            <a:pPr>
+              <a:defRPr sz="2800" b="1">
+                <a:solidFill>
+                  <a:srgbClr val="17263D"/>
+                </a:solidFill>
+                <a:latin typeface="Microsoft YaHei"/>
+              </a:defRPr>
+            </a:pPr>
+            <a:r>
+              <a:t>相同网络，变化集中在训练行为</a:t>
+            </a:r>
+          </a:p>
+        </p:txBody>
+      </p:sp>
+      <p:sp>
+        <p:nvSpPr>
+          <p:cNvPr id="3" name="TextBox 2"/>
+          <p:cNvSpPr txBox="1"/>
+          <p:nvPr/>
+        </p:nvSpPr>
+        <p:spPr>
+          <a:xfrm>
+            <a:off x="457200" y="868680"/>
+            <a:ext cx="11247120" cy="411480"/>
+          </a:xfrm>
+          <a:prstGeom prst="rect">
+            <a:avLst/>
+          </a:prstGeom>
+          <a:noFill/>
+        </p:spPr>
+        <p:txBody>
+          <a:bodyPr wrap="square" lIns="0" rIns="0" tIns="0" bIns="0">
+            <a:spAutoFit/>
+          </a:bodyPr>
+          <a:lstStyle/>
+          <a:p>
+            <a:pPr>
+              <a:defRPr sz="1500" b="0">
+                <a:solidFill>
+                  <a:srgbClr val="52637A"/>
+                </a:solidFill>
+                <a:latin typeface="Microsoft YaHei"/>
+              </a:defRPr>
+            </a:pPr>
+            <a:r>
+              <a:t>本机实际运行记录｜更新于 2026-10-15 18:46 EDT</a:t>
+            </a:r>
+          </a:p>
+        </p:txBody>
+      </p:sp>
+      <p:graphicFrame>
+        <p:nvGraphicFramePr>
+          <p:cNvPr id="4" name="Table 3"/>
+          <p:cNvGraphicFramePr>
+            <a:graphicFrameLocks noGrp="1"/>
+          </p:cNvGraphicFramePr>
+          <p:nvPr/>
+        </p:nvGraphicFramePr>
+        <p:xfrm>
+          <a:off x="457200" y="1508760"/>
+          <a:ext cx="11274552" cy="4434837"/>
+        </p:xfrm>
+        <a:graphic>
+          <a:graphicData uri="http://schemas.openxmlformats.org/drawingml/2006/table">
+            <a:tbl>
+              <a:tblPr firstRow="1" bandRow="1">
+                <a:tableStyleId>{5C22544A-7EE6-4342-B048-85BDC9FD1C3A}</a:tableStyleId>
+              </a:tblPr>
+              <a:tblGrid>
+                <a:gridCol w="3758184"/>
+                <a:gridCol w="3758184"/>
+                <a:gridCol w="3758184"/>
+              </a:tblGrid>
+              <a:tr h="530352">
+                <a:tc>
+                  <a:txBody>
+                    <a:bodyPr/>
+                    <a:lstStyle/>
+                    <a:p>
+                      <a:pPr>
+                        <a:defRPr sz="1700" b="1">
+                          <a:solidFill>
+                            <a:srgbClr val="FFFFFF"/>
+                          </a:solidFill>
+                          <a:latin typeface="Microsoft YaHei"/>
+                        </a:defRPr>
+                      </a:pPr>
+                      <a:r>
+                        <a:t>项目</a:t>
+                      </a:r>
+                    </a:p>
+                  </a:txBody>
+                  <a:tcPr marL="118872" marR="118872" marT="91440" marB="54864">
+                    <a:solidFill>
+                      <a:srgbClr val="007E87"/>
+                    </a:solidFill>
+                  </a:tcPr>
+                </a:tc>
+                <a:tc>
+                  <a:txBody>
+                    <a:bodyPr/>
+                    <a:lstStyle/>
+                    <a:p>
+                      <a:pPr>
+                        <a:defRPr sz="1700" b="1">
+                          <a:solidFill>
+                            <a:srgbClr val="FFFFFF"/>
+                          </a:solidFill>
+                          <a:latin typeface="Microsoft YaHei"/>
+                        </a:defRPr>
+                      </a:pPr>
+                      <a:r>
+                        <a:t>之前 self-trained</a:t>
+                      </a:r>
+                    </a:p>
+                  </a:txBody>
+                  <a:tcPr marL="118872" marR="118872" marT="91440" marB="54864">
+                    <a:solidFill>
+                      <a:srgbClr val="007E87"/>
+                    </a:solidFill>
+                  </a:tcPr>
+                </a:tc>
+                <a:tc>
+                  <a:txBody>
+                    <a:bodyPr/>
+                    <a:lstStyle/>
+                    <a:p>
+                      <a:pPr>
+                        <a:defRPr sz="1700" b="1">
+                          <a:solidFill>
+                            <a:srgbClr val="FFFFFF"/>
+                          </a:solidFill>
+                          <a:latin typeface="Microsoft YaHei"/>
+                        </a:defRPr>
+                      </a:pPr>
+                      <a:r>
+                        <a:t>本次 FreiHAND 第50轮</a:t>
+                      </a:r>
+                    </a:p>
+                  </a:txBody>
+                  <a:tcPr marL="118872" marR="118872" marT="91440" marB="54864">
+                    <a:solidFill>
+                      <a:srgbClr val="007E87"/>
+                    </a:solidFill>
+                  </a:tcPr>
+                </a:tc>
+              </a:tr>
+              <a:tr h="780897">
+                <a:tc>
+                  <a:txBody>
+                    <a:bodyPr/>
+                    <a:lstStyle/>
+                    <a:p>
+                      <a:pPr>
+                        <a:defRPr sz="1700" b="0">
+                          <a:solidFill>
+                            <a:srgbClr val="17263D"/>
+                          </a:solidFill>
+                          <a:latin typeface="Microsoft YaHei"/>
+                        </a:defRPr>
+                      </a:pPr>
+                      <a:r>
+                        <a:t>主体 / Token</a:t>
+                      </a:r>
+                    </a:p>
+                  </a:txBody>
+                  <a:tcPr marL="118872" marR="118872" marT="91440" marB="54864">
+                    <a:solidFill>
+                      <a:srgbClr val="FFFFFF"/>
+                    </a:solidFill>
+                  </a:tcPr>
+                </a:tc>
+                <a:tc>
+                  <a:txBody>
+                    <a:bodyPr/>
+                    <a:lstStyle/>
+                    <a:p>
+                      <a:pPr>
+                        <a:defRPr sz="1700" b="0">
+                          <a:solidFill>
+                            <a:srgbClr val="17263D"/>
+                          </a:solidFill>
+                          <a:latin typeface="Microsoft YaHei"/>
+                        </a:defRPr>
+                      </a:pPr>
+                      <a:r>
+                        <a:t>ViT → MANO → RefineNet；16+1+1</a:t>
+                      </a:r>
+                    </a:p>
+                  </a:txBody>
+                  <a:tcPr marL="118872" marR="118872" marT="91440" marB="54864">
+                    <a:solidFill>
+                      <a:srgbClr val="FFFFFF"/>
+                    </a:solidFill>
+                  </a:tcPr>
+                </a:tc>
+                <a:tc>
+                  <a:txBody>
+                    <a:bodyPr/>
+                    <a:lstStyle/>
+                    <a:p>
+                      <a:pPr>
+                        <a:defRPr sz="1700" b="0">
+                          <a:solidFill>
+                            <a:srgbClr val="17263D"/>
+                          </a:solidFill>
+                          <a:latin typeface="Microsoft YaHei"/>
+                        </a:defRPr>
+                      </a:pPr>
+                      <a:r>
+                        <a:t>相同；RefineNet两次都参与更新</a:t>
+                      </a:r>
+                    </a:p>
+                  </a:txBody>
+                  <a:tcPr marL="118872" marR="118872" marT="91440" marB="54864">
+                    <a:solidFill>
+                      <a:srgbClr val="FFFFFF"/>
+                    </a:solidFill>
+                  </a:tcPr>
+                </a:tc>
+              </a:tr>
+              <a:tr h="780897">
+                <a:tc>
+                  <a:txBody>
+                    <a:bodyPr/>
+                    <a:lstStyle/>
+                    <a:p>
+                      <a:pPr>
+                        <a:defRPr sz="1700" b="0">
+                          <a:solidFill>
+                            <a:srgbClr val="17263D"/>
+                          </a:solidFill>
+                          <a:latin typeface="Microsoft YaHei"/>
+                        </a:defRPr>
+                      </a:pPr>
+                      <a:r>
+                        <a:t>相机 / 优化器</a:t>
+                      </a:r>
+                    </a:p>
+                  </a:txBody>
+                  <a:tcPr marL="118872" marR="118872" marT="91440" marB="54864">
+                    <a:solidFill>
+                      <a:srgbClr val="E8EEF5"/>
+                    </a:solidFill>
+                  </a:tcPr>
+                </a:tc>
+                <a:tc>
+                  <a:txBody>
+                    <a:bodyPr/>
+                    <a:lstStyle/>
+                    <a:p>
+                      <a:pPr>
+                        <a:defRPr sz="1700" b="0">
+                          <a:solidFill>
+                            <a:srgbClr val="17263D"/>
+                          </a:solidFill>
+                          <a:latin typeface="Microsoft YaHei"/>
+                        </a:defRPr>
+                      </a:pPr>
+                      <a:r>
+                        <a:t>透视投影；均值[4,0,0]；AdamW</a:t>
+                      </a:r>
+                    </a:p>
+                  </a:txBody>
+                  <a:tcPr marL="118872" marR="118872" marT="91440" marB="54864">
+                    <a:solidFill>
+                      <a:srgbClr val="E8EEF5"/>
+                    </a:solidFill>
+                  </a:tcPr>
+                </a:tc>
+                <a:tc>
+                  <a:txBody>
+                    <a:bodyPr/>
+                    <a:lstStyle/>
+                    <a:p>
+                      <a:pPr>
+                        <a:defRPr sz="1700" b="0">
+                          <a:solidFill>
+                            <a:srgbClr val="17263D"/>
+                          </a:solidFill>
+                          <a:latin typeface="Microsoft YaHei"/>
+                        </a:defRPr>
+                      </a:pPr>
+                      <a:r>
+                        <a:t>相同；LR=1e-5，WD=1e-4</a:t>
+                      </a:r>
+                    </a:p>
+                  </a:txBody>
+                  <a:tcPr marL="118872" marR="118872" marT="91440" marB="54864">
+                    <a:solidFill>
+                      <a:srgbClr val="E8EEF5"/>
+                    </a:solidFill>
+                  </a:tcPr>
+                </a:tc>
+              </a:tr>
+              <a:tr h="780897">
+                <a:tc>
+                  <a:txBody>
+                    <a:bodyPr/>
+                    <a:lstStyle/>
+                    <a:p>
+                      <a:pPr>
+                        <a:defRPr sz="1700" b="0">
+                          <a:solidFill>
+                            <a:srgbClr val="17263D"/>
+                          </a:solidFill>
+                          <a:latin typeface="Microsoft YaHei"/>
+                        </a:defRPr>
+                      </a:pPr>
+                      <a:r>
+                        <a:t>监督loss</a:t>
+                      </a:r>
+                    </a:p>
+                  </a:txBody>
+                  <a:tcPr marL="118872" marR="118872" marT="91440" marB="54864">
+                    <a:solidFill>
+                      <a:srgbClr val="FFFFFF"/>
+                    </a:solidFill>
+                  </a:tcPr>
+                </a:tc>
+                <a:tc>
+                  <a:txBody>
+                    <a:bodyPr/>
+                    <a:lstStyle/>
+                    <a:p>
+                      <a:pPr>
+                        <a:defRPr sz="1700" b="0">
+                          <a:solidFill>
+                            <a:srgbClr val="17263D"/>
+                          </a:solidFill>
+                          <a:latin typeface="Microsoft YaHei"/>
+                        </a:defRPr>
+                      </a:pPr>
+                      <a:r>
+                        <a:t>每卡8个样本直接求和</a:t>
+                      </a:r>
+                    </a:p>
+                  </a:txBody>
+                  <a:tcPr marL="118872" marR="118872" marT="91440" marB="54864">
+                    <a:solidFill>
+                      <a:srgbClr val="FFFFFF"/>
+                    </a:solidFill>
+                  </a:tcPr>
+                </a:tc>
+                <a:tc>
+                  <a:txBody>
+                    <a:bodyPr/>
+                    <a:lstStyle/>
+                    <a:p>
+                      <a:pPr>
+                        <a:defRPr sz="1700" b="0">
+                          <a:solidFill>
+                            <a:srgbClr val="17263D"/>
+                          </a:solidFill>
+                          <a:latin typeface="Microsoft YaHei"/>
+                        </a:defRPr>
+                      </a:pPr>
+                      <a:r>
+                        <a:t>每卡512求和后 × 128/512</a:t>
+                      </a:r>
+                    </a:p>
+                  </a:txBody>
+                  <a:tcPr marL="118872" marR="118872" marT="91440" marB="54864">
+                    <a:solidFill>
+                      <a:srgbClr val="FFFFFF"/>
+                    </a:solidFill>
+                  </a:tcPr>
+                </a:tc>
+              </a:tr>
+              <a:tr h="780897">
+                <a:tc>
+                  <a:txBody>
+                    <a:bodyPr/>
+                    <a:lstStyle/>
+                    <a:p>
+                      <a:pPr>
+                        <a:defRPr sz="1700" b="0">
+                          <a:solidFill>
+                            <a:srgbClr val="17263D"/>
+                          </a:solidFill>
+                          <a:latin typeface="Microsoft YaHei"/>
+                        </a:defRPr>
+                      </a:pPr>
+                      <a:r>
+                        <a:t>对抗项 / 先验</a:t>
+                      </a:r>
+                    </a:p>
+                  </a:txBody>
+                  <a:tcPr marL="118872" marR="118872" marT="91440" marB="54864">
+                    <a:solidFill>
+                      <a:srgbClr val="E8EEF5"/>
+                    </a:solidFill>
+                  </a:tcPr>
+                </a:tc>
+                <a:tc>
+                  <a:txBody>
+                    <a:bodyPr/>
+                    <a:lstStyle/>
+                    <a:p>
+                      <a:pPr>
+                        <a:defRPr sz="1700" b="0">
+                          <a:solidFill>
+                            <a:srgbClr val="17263D"/>
+                          </a:solidFill>
+                          <a:latin typeface="Microsoft YaHei"/>
+                        </a:defRPr>
+                      </a:pPr>
+                      <a:r>
+                        <a:t>对抗项按样本平均；独立mocap文件</a:t>
+                      </a:r>
+                    </a:p>
+                  </a:txBody>
+                  <a:tcPr marL="118872" marR="118872" marT="91440" marB="54864">
+                    <a:solidFill>
+                      <a:srgbClr val="E8EEF5"/>
+                    </a:solidFill>
+                  </a:tcPr>
+                </a:tc>
+                <a:tc>
+                  <a:txBody>
+                    <a:bodyPr/>
+                    <a:lstStyle/>
+                    <a:p>
+                      <a:pPr>
+                        <a:defRPr sz="1700" b="0">
+                          <a:solidFill>
+                            <a:srgbClr val="17263D"/>
+                          </a:solidFill>
+                          <a:latin typeface="Microsoft YaHei"/>
+                        </a:defRPr>
+                      </a:pPr>
+                      <a:r>
+                        <a:t>对抗项按样本平均；仅训练集先验</a:t>
+                      </a:r>
+                    </a:p>
+                  </a:txBody>
+                  <a:tcPr marL="118872" marR="118872" marT="91440" marB="54864">
+                    <a:solidFill>
+                      <a:srgbClr val="E8EEF5"/>
+                    </a:solidFill>
+                  </a:tcPr>
+                </a:tc>
+              </a:tr>
+              <a:tr h="780897">
+                <a:tc>
+                  <a:txBody>
+                    <a:bodyPr/>
+                    <a:lstStyle/>
+                    <a:p>
+                      <a:pPr>
+                        <a:defRPr sz="1700" b="0">
+                          <a:solidFill>
+                            <a:srgbClr val="17263D"/>
+                          </a:solidFill>
+                          <a:latin typeface="Microsoft YaHei"/>
+                        </a:defRPr>
+                      </a:pPr>
+                      <a:r>
+                        <a:t>实际影响</a:t>
+                      </a:r>
+                    </a:p>
+                  </a:txBody>
+                  <a:tcPr marL="118872" marR="118872" marT="91440" marB="54864">
+                    <a:solidFill>
+                      <a:srgbClr val="FFFFFF"/>
+                    </a:solidFill>
+                  </a:tcPr>
+                </a:tc>
+                <a:tc>
+                  <a:txBody>
+                    <a:bodyPr/>
+                    <a:lstStyle/>
+                    <a:p>
+                      <a:pPr>
+                        <a:defRPr sz="1700" b="0">
+                          <a:solidFill>
+                            <a:srgbClr val="17263D"/>
+                          </a:solidFill>
+                          <a:latin typeface="Microsoft YaHei"/>
+                        </a:defRPr>
+                      </a:pPr>
+                      <a:r>
+                        <a:t>监督项对应每卡8样本的尺度</a:t>
+                      </a:r>
+                    </a:p>
+                  </a:txBody>
+                  <a:tcPr marL="118872" marR="118872" marT="91440" marB="54864">
+                    <a:solidFill>
+                      <a:srgbClr val="FFFFFF"/>
+                    </a:solidFill>
+                  </a:tcPr>
+                </a:tc>
+                <a:tc>
+                  <a:txBody>
+                    <a:bodyPr/>
+                    <a:lstStyle/>
+                    <a:p>
+                      <a:pPr>
+                        <a:defRPr sz="1700" b="0">
+                          <a:solidFill>
+                            <a:srgbClr val="17263D"/>
+                          </a:solidFill>
+                          <a:latin typeface="Microsoft YaHei"/>
+                        </a:defRPr>
+                      </a:pPr>
+                      <a:r>
+                        <a:t>监督项对应参考每卡128的尺度</a:t>
+                      </a:r>
+                    </a:p>
+                  </a:txBody>
+                  <a:tcPr marL="118872" marR="118872" marT="91440" marB="54864">
+                    <a:solidFill>
+                      <a:srgbClr val="FFFFFF"/>
+                    </a:solidFill>
+                  </a:tcPr>
+                </a:tc>
+              </a:tr>
+            </a:tbl>
+          </a:graphicData>
+        </a:graphic>
+      </p:graphicFrame>
+      <p:sp>
+        <p:nvSpPr>
+          <p:cNvPr id="5" name="TextBox 4"/>
+          <p:cNvSpPr txBox="1"/>
+          <p:nvPr/>
+        </p:nvSpPr>
+        <p:spPr>
+          <a:xfrm>
+            <a:off x="457200" y="6053328"/>
+            <a:ext cx="11247120" cy="402336"/>
+          </a:xfrm>
+          <a:prstGeom prst="rect">
+            <a:avLst/>
+          </a:prstGeom>
+          <a:noFill/>
+        </p:spPr>
+        <p:txBody>
+          <a:bodyPr wrap="square" lIns="0" rIns="0" tIns="0" bIns="0">
+            <a:spAutoFit/>
+          </a:bodyPr>
+          <a:lstStyle/>
+          <a:p>
+            <a:pPr>
+              <a:defRPr sz="1200" b="0">
+                <a:solidFill>
+                  <a:srgbClr val="52637A"/>
+                </a:solidFill>
+                <a:latin typeface="Microsoft YaHei"/>
+              </a:defRPr>
+            </a:pPr>
+            <a:r>
+              <a:t>本次正式配置未启用单pose token、弱透视或顶点loss。监督项与对抗项的相对尺度改变，原始loss不可直接横比。</a:t>
+            </a:r>
+          </a:p>
+        </p:txBody>
+      </p:sp>
+      <p:sp>
+        <p:nvSpPr>
+          <p:cNvPr id="6" name="TextBox 5"/>
+          <p:cNvSpPr txBox="1"/>
+          <p:nvPr/>
+        </p:nvSpPr>
+        <p:spPr>
+          <a:xfrm>
+            <a:off x="457200" y="6492240"/>
+            <a:ext cx="10789920" cy="210312"/>
+          </a:xfrm>
+          <a:prstGeom prst="rect">
+            <a:avLst/>
+          </a:prstGeom>
+          <a:noFill/>
+        </p:spPr>
+        <p:txBody>
+          <a:bodyPr wrap="square" lIns="0" rIns="0" tIns="0" bIns="0">
+            <a:spAutoFit/>
+          </a:bodyPr>
+          <a:lstStyle/>
+          <a:p>
+            <a:pPr>
+              <a:defRPr sz="1000" b="0">
+                <a:solidFill>
+                  <a:srgbClr val="007E87"/>
+                </a:solidFill>
+                <a:latin typeface="Microsoft YaHei"/>
+              </a:defRPr>
+            </a:pPr>
+            <a:r>
+              <a:t>来源：wilor/models/wilor.py；两次model_config.yaml；训练复盘的已核验记录</a:t>
+            </a:r>
+          </a:p>
+        </p:txBody>
+      </p:sp>
+      <p:sp>
+        <p:nvSpPr>
+          <p:cNvPr id="7" name="TextBox 6"/>
+          <p:cNvSpPr txBox="1"/>
+          <p:nvPr/>
+        </p:nvSpPr>
+        <p:spPr>
+          <a:xfrm>
+            <a:off x="11247120" y="6464808"/>
+            <a:ext cx="457200" cy="274320"/>
+          </a:xfrm>
+          <a:prstGeom prst="rect">
+            <a:avLst/>
+          </a:prstGeom>
+          <a:noFill/>
+        </p:spPr>
+        <p:txBody>
+          <a:bodyPr wrap="square" lIns="0" rIns="0" tIns="0" bIns="0">
+            <a:spAutoFit/>
+          </a:bodyPr>
+          <a:lstStyle/>
+          <a:p>
+            <a:pPr>
+              <a:defRPr sz="1100" b="0">
+                <a:solidFill>
+                  <a:srgbClr val="52637A"/>
+                </a:solidFill>
+                <a:latin typeface="Microsoft YaHei"/>
+              </a:defRPr>
+            </a:pPr>
+            <a:r>
+              <a:t>33</a:t>
+            </a:r>
+          </a:p>
+        </p:txBody>
+      </p:sp>
+    </p:spTree>
+  </p:cSld>
+  <p:clrMapOvr>
+    <a:masterClrMapping/>
+  </p:clrMapOvr>
+</p:sld>
+</file>
+
+<file path=ppt/slides/slide34.xml><?xml version="1.0" encoding="utf-8"?>
+<p:sld xmlns:a="http://schemas.openxmlformats.org/drawingml/2006/main" xmlns:p="http://schemas.openxmlformats.org/presentationml/2006/main" xmlns:r="http://schemas.openxmlformats.org/officeDocument/2006/relationships">
+  <p:cSld>
+    <p:bg>
+      <p:bgPr>
+        <a:solidFill>
+          <a:srgbClr val="F4F7FB"/>
+        </a:solidFill>
+        <a:effectLst/>
+      </p:bgPr>
+    </p:bg>
+    <p:spTree>
+      <p:nvGrpSpPr>
+        <p:cNvPr id="1" name=""/>
+        <p:cNvGrpSpPr/>
+        <p:nvPr/>
+      </p:nvGrpSpPr>
+      <p:grpSpPr/>
+      <p:sp>
+        <p:nvSpPr>
+          <p:cNvPr id="2" name="TextBox 1"/>
+          <p:cNvSpPr txBox="1"/>
+          <p:nvPr/>
+        </p:nvSpPr>
+        <p:spPr>
+          <a:xfrm>
+            <a:off x="457200" y="228600"/>
+            <a:ext cx="11247120" cy="502920"/>
+          </a:xfrm>
+          <a:prstGeom prst="rect">
+            <a:avLst/>
+          </a:prstGeom>
+          <a:noFill/>
+        </p:spPr>
+        <p:txBody>
+          <a:bodyPr wrap="square" lIns="0" rIns="0" tIns="0" bIns="0">
+            <a:spAutoFit/>
+          </a:bodyPr>
+          <a:lstStyle/>
+          <a:p>
+            <a:pPr>
+              <a:defRPr sz="2800" b="1">
+                <a:solidFill>
+                  <a:srgbClr val="17263D"/>
+                </a:solidFill>
+                <a:latin typeface="Microsoft YaHei"/>
+              </a:defRPr>
+            </a:pPr>
+            <a:r>
+              <a:t>同口径官方评测：旧 checkpoint 表现更好</a:t>
+            </a:r>
+          </a:p>
+        </p:txBody>
+      </p:sp>
+      <p:sp>
+        <p:nvSpPr>
+          <p:cNvPr id="3" name="TextBox 2"/>
+          <p:cNvSpPr txBox="1"/>
+          <p:nvPr/>
+        </p:nvSpPr>
+        <p:spPr>
+          <a:xfrm>
+            <a:off x="457200" y="868680"/>
+            <a:ext cx="11247120" cy="411480"/>
+          </a:xfrm>
+          <a:prstGeom prst="rect">
+            <a:avLst/>
+          </a:prstGeom>
+          <a:noFill/>
+        </p:spPr>
+        <p:txBody>
+          <a:bodyPr wrap="square" lIns="0" rIns="0" tIns="0" bIns="0">
+            <a:spAutoFit/>
+          </a:bodyPr>
+          <a:lstStyle/>
+          <a:p>
+            <a:pPr>
+              <a:defRPr sz="1500" b="0">
+                <a:solidFill>
+                  <a:srgbClr val="52637A"/>
+                </a:solidFill>
+                <a:latin typeface="Microsoft YaHei"/>
+              </a:defRPr>
+            </a:pPr>
+            <a:r>
+              <a:t>本机实际运行记录｜更新于 2026-10-15 18:46 EDT</a:t>
+            </a:r>
+          </a:p>
+        </p:txBody>
+      </p:sp>
+      <p:graphicFrame>
+        <p:nvGraphicFramePr>
+          <p:cNvPr id="4" name="Table 3"/>
+          <p:cNvGraphicFramePr>
+            <a:graphicFrameLocks noGrp="1"/>
+          </p:cNvGraphicFramePr>
+          <p:nvPr/>
+        </p:nvGraphicFramePr>
+        <p:xfrm>
+          <a:off x="457200" y="1508760"/>
+          <a:ext cx="11274552" cy="4434836"/>
+        </p:xfrm>
+        <a:graphic>
+          <a:graphicData uri="http://schemas.openxmlformats.org/drawingml/2006/table">
+            <a:tbl>
+              <a:tblPr firstRow="1" bandRow="1">
+                <a:tableStyleId>{5C22544A-7EE6-4342-B048-85BDC9FD1C3A}</a:tableStyleId>
+              </a:tblPr>
+              <a:tblGrid>
+                <a:gridCol w="2743200"/>
+                <a:gridCol w="2743200"/>
+                <a:gridCol w="2743200"/>
+                <a:gridCol w="3044952"/>
+              </a:tblGrid>
+              <a:tr h="530352">
+                <a:tc>
+                  <a:txBody>
+                    <a:bodyPr/>
+                    <a:lstStyle/>
+                    <a:p>
+                      <a:pPr>
+                        <a:defRPr sz="1600" b="1">
+                          <a:solidFill>
+                            <a:srgbClr val="FFFFFF"/>
+                          </a:solidFill>
+                          <a:latin typeface="Microsoft YaHei"/>
+                        </a:defRPr>
+                      </a:pPr>
+                      <a:r>
+                        <a:t>指标</a:t>
+                      </a:r>
+                    </a:p>
+                  </a:txBody>
+                  <a:tcPr marL="118872" marR="118872" marT="91440" marB="54864">
+                    <a:solidFill>
+                      <a:srgbClr val="007E87"/>
+                    </a:solidFill>
+                  </a:tcPr>
+                </a:tc>
+                <a:tc>
+                  <a:txBody>
+                    <a:bodyPr/>
+                    <a:lstStyle/>
+                    <a:p>
+                      <a:pPr>
+                        <a:defRPr sz="1600" b="1">
+                          <a:solidFill>
+                            <a:srgbClr val="FFFFFF"/>
+                          </a:solidFill>
+                          <a:latin typeface="Microsoft YaHei"/>
+                        </a:defRPr>
+                      </a:pPr>
+                      <a:r>
+                        <a:t>之前 self-trained</a:t>
+                      </a:r>
+                    </a:p>
+                  </a:txBody>
+                  <a:tcPr marL="118872" marR="118872" marT="91440" marB="54864">
+                    <a:solidFill>
+                      <a:srgbClr val="007E87"/>
+                    </a:solidFill>
+                  </a:tcPr>
+                </a:tc>
+                <a:tc>
+                  <a:txBody>
+                    <a:bodyPr/>
+                    <a:lstStyle/>
+                    <a:p>
+                      <a:pPr>
+                        <a:defRPr sz="1600" b="1">
+                          <a:solidFill>
+                            <a:srgbClr val="FFFFFF"/>
+                          </a:solidFill>
+                          <a:latin typeface="Microsoft YaHei"/>
+                        </a:defRPr>
+                      </a:pPr>
+                      <a:r>
+                        <a:t>本次第50轮</a:t>
+                      </a:r>
+                    </a:p>
+                  </a:txBody>
+                  <a:tcPr marL="118872" marR="118872" marT="91440" marB="54864">
+                    <a:solidFill>
+                      <a:srgbClr val="007E87"/>
+                    </a:solidFill>
+                  </a:tcPr>
+                </a:tc>
+                <a:tc>
+                  <a:txBody>
+                    <a:bodyPr/>
+                    <a:lstStyle/>
+                    <a:p>
+                      <a:pPr>
+                        <a:defRPr sz="1600" b="1">
+                          <a:solidFill>
+                            <a:srgbClr val="FFFFFF"/>
+                          </a:solidFill>
+                          <a:latin typeface="Microsoft YaHei"/>
+                        </a:defRPr>
+                      </a:pPr>
+                      <a:r>
+                        <a:t>本次 − 之前</a:t>
+                      </a:r>
+                    </a:p>
+                  </a:txBody>
+                  <a:tcPr marL="118872" marR="118872" marT="91440" marB="54864">
+                    <a:solidFill>
+                      <a:srgbClr val="007E87"/>
+                    </a:solidFill>
+                  </a:tcPr>
+                </a:tc>
+              </a:tr>
+              <a:tr h="976121">
+                <a:tc>
+                  <a:txBody>
+                    <a:bodyPr/>
+                    <a:lstStyle/>
+                    <a:p>
+                      <a:pPr>
+                        <a:defRPr sz="1600" b="0">
+                          <a:solidFill>
+                            <a:srgbClr val="17263D"/>
+                          </a:solidFill>
+                          <a:latin typeface="Microsoft YaHei"/>
+                        </a:defRPr>
+                      </a:pPr>
+                      <a:r>
+                        <a:t>PA-MPJPE ↓</a:t>
+                      </a:r>
+                    </a:p>
+                  </a:txBody>
+                  <a:tcPr marL="118872" marR="118872" marT="91440" marB="54864">
+                    <a:solidFill>
+                      <a:srgbClr val="FFFFFF"/>
+                    </a:solidFill>
+                  </a:tcPr>
+                </a:tc>
+                <a:tc>
+                  <a:txBody>
+                    <a:bodyPr/>
+                    <a:lstStyle/>
+                    <a:p>
+                      <a:pPr>
+                        <a:defRPr sz="1600" b="0">
+                          <a:solidFill>
+                            <a:srgbClr val="17263D"/>
+                          </a:solidFill>
+                          <a:latin typeface="Microsoft YaHei"/>
+                        </a:defRPr>
+                      </a:pPr>
+                      <a:r>
+                        <a:t>7.942 mm</a:t>
+                      </a:r>
+                    </a:p>
+                  </a:txBody>
+                  <a:tcPr marL="118872" marR="118872" marT="91440" marB="54864">
+                    <a:solidFill>
+                      <a:srgbClr val="FFFFFF"/>
+                    </a:solidFill>
+                  </a:tcPr>
+                </a:tc>
+                <a:tc>
+                  <a:txBody>
+                    <a:bodyPr/>
+                    <a:lstStyle/>
+                    <a:p>
+                      <a:pPr>
+                        <a:defRPr sz="1600" b="0">
+                          <a:solidFill>
+                            <a:srgbClr val="17263D"/>
+                          </a:solidFill>
+                          <a:latin typeface="Microsoft YaHei"/>
+                        </a:defRPr>
+                      </a:pPr>
+                      <a:r>
+                        <a:t>9.395 mm</a:t>
+                      </a:r>
+                    </a:p>
+                  </a:txBody>
+                  <a:tcPr marL="118872" marR="118872" marT="91440" marB="54864">
+                    <a:solidFill>
+                      <a:srgbClr val="FFFFFF"/>
+                    </a:solidFill>
+                  </a:tcPr>
+                </a:tc>
+                <a:tc>
+                  <a:txBody>
+                    <a:bodyPr/>
+                    <a:lstStyle/>
+                    <a:p>
+                      <a:pPr>
+                        <a:defRPr sz="1600" b="0">
+                          <a:solidFill>
+                            <a:srgbClr val="17263D"/>
+                          </a:solidFill>
+                          <a:latin typeface="Microsoft YaHei"/>
+                        </a:defRPr>
+                      </a:pPr>
+                      <a:r>
+                        <a:t>+1.453 mm</a:t>
+                      </a:r>
+                    </a:p>
+                  </a:txBody>
+                  <a:tcPr marL="118872" marR="118872" marT="91440" marB="54864">
+                    <a:solidFill>
+                      <a:srgbClr val="FFFFFF"/>
+                    </a:solidFill>
+                  </a:tcPr>
+                </a:tc>
+              </a:tr>
+              <a:tr h="976121">
+                <a:tc>
+                  <a:txBody>
+                    <a:bodyPr/>
+                    <a:lstStyle/>
+                    <a:p>
+                      <a:pPr>
+                        <a:defRPr sz="1600" b="0">
+                          <a:solidFill>
+                            <a:srgbClr val="17263D"/>
+                          </a:solidFill>
+                          <a:latin typeface="Microsoft YaHei"/>
+                        </a:defRPr>
+                      </a:pPr>
+                      <a:r>
+                        <a:t>PA-MPVPE ↓</a:t>
+                      </a:r>
+                    </a:p>
+                  </a:txBody>
+                  <a:tcPr marL="118872" marR="118872" marT="91440" marB="54864">
+                    <a:solidFill>
+                      <a:srgbClr val="E8EEF5"/>
+                    </a:solidFill>
+                  </a:tcPr>
+                </a:tc>
+                <a:tc>
+                  <a:txBody>
+                    <a:bodyPr/>
+                    <a:lstStyle/>
+                    <a:p>
+                      <a:pPr>
+                        <a:defRPr sz="1600" b="0">
+                          <a:solidFill>
+                            <a:srgbClr val="17263D"/>
+                          </a:solidFill>
+                          <a:latin typeface="Microsoft YaHei"/>
+                        </a:defRPr>
+                      </a:pPr>
+                      <a:r>
+                        <a:t>7.497 mm</a:t>
+                      </a:r>
+                    </a:p>
+                  </a:txBody>
+                  <a:tcPr marL="118872" marR="118872" marT="91440" marB="54864">
+                    <a:solidFill>
+                      <a:srgbClr val="E8EEF5"/>
+                    </a:solidFill>
+                  </a:tcPr>
+                </a:tc>
+                <a:tc>
+                  <a:txBody>
+                    <a:bodyPr/>
+                    <a:lstStyle/>
+                    <a:p>
+                      <a:pPr>
+                        <a:defRPr sz="1600" b="0">
+                          <a:solidFill>
+                            <a:srgbClr val="17263D"/>
+                          </a:solidFill>
+                          <a:latin typeface="Microsoft YaHei"/>
+                        </a:defRPr>
+                      </a:pPr>
+                      <a:r>
+                        <a:t>8.949 mm</a:t>
+                      </a:r>
+                    </a:p>
+                  </a:txBody>
+                  <a:tcPr marL="118872" marR="118872" marT="91440" marB="54864">
+                    <a:solidFill>
+                      <a:srgbClr val="E8EEF5"/>
+                    </a:solidFill>
+                  </a:tcPr>
+                </a:tc>
+                <a:tc>
+                  <a:txBody>
+                    <a:bodyPr/>
+                    <a:lstStyle/>
+                    <a:p>
+                      <a:pPr>
+                        <a:defRPr sz="1600" b="0">
+                          <a:solidFill>
+                            <a:srgbClr val="17263D"/>
+                          </a:solidFill>
+                          <a:latin typeface="Microsoft YaHei"/>
+                        </a:defRPr>
+                      </a:pPr>
+                      <a:r>
+                        <a:t>+1.453 mm</a:t>
+                      </a:r>
+                    </a:p>
+                  </a:txBody>
+                  <a:tcPr marL="118872" marR="118872" marT="91440" marB="54864">
+                    <a:solidFill>
+                      <a:srgbClr val="E8EEF5"/>
+                    </a:solidFill>
+                  </a:tcPr>
+                </a:tc>
+              </a:tr>
+              <a:tr h="976121">
+                <a:tc>
+                  <a:txBody>
+                    <a:bodyPr/>
+                    <a:lstStyle/>
+                    <a:p>
+                      <a:pPr>
+                        <a:defRPr sz="1600" b="0">
+                          <a:solidFill>
+                            <a:srgbClr val="17263D"/>
+                          </a:solidFill>
+                          <a:latin typeface="Microsoft YaHei"/>
+                        </a:defRPr>
+                      </a:pPr>
+                      <a:r>
+                        <a:t>F@5mm ↑</a:t>
+                      </a:r>
+                    </a:p>
+                  </a:txBody>
+                  <a:tcPr marL="118872" marR="118872" marT="91440" marB="54864">
+                    <a:solidFill>
+                      <a:srgbClr val="FFFFFF"/>
+                    </a:solidFill>
+                  </a:tcPr>
+                </a:tc>
+                <a:tc>
+                  <a:txBody>
+                    <a:bodyPr/>
+                    <a:lstStyle/>
+                    <a:p>
+                      <a:pPr>
+                        <a:defRPr sz="1600" b="0">
+                          <a:solidFill>
+                            <a:srgbClr val="17263D"/>
+                          </a:solidFill>
+                          <a:latin typeface="Microsoft YaHei"/>
+                        </a:defRPr>
+                      </a:pPr>
+                      <a:r>
+                        <a:t>67.31%</a:t>
+                      </a:r>
+                    </a:p>
+                  </a:txBody>
+                  <a:tcPr marL="118872" marR="118872" marT="91440" marB="54864">
+                    <a:solidFill>
+                      <a:srgbClr val="FFFFFF"/>
+                    </a:solidFill>
+                  </a:tcPr>
+                </a:tc>
+                <a:tc>
+                  <a:txBody>
+                    <a:bodyPr/>
+                    <a:lstStyle/>
+                    <a:p>
+                      <a:pPr>
+                        <a:defRPr sz="1600" b="0">
+                          <a:solidFill>
+                            <a:srgbClr val="17263D"/>
+                          </a:solidFill>
+                          <a:latin typeface="Microsoft YaHei"/>
+                        </a:defRPr>
+                      </a:pPr>
+                      <a:r>
+                        <a:t>59.07%</a:t>
+                      </a:r>
+                    </a:p>
+                  </a:txBody>
+                  <a:tcPr marL="118872" marR="118872" marT="91440" marB="54864">
+                    <a:solidFill>
+                      <a:srgbClr val="FFFFFF"/>
+                    </a:solidFill>
+                  </a:tcPr>
+                </a:tc>
+                <a:tc>
+                  <a:txBody>
+                    <a:bodyPr/>
+                    <a:lstStyle/>
+                    <a:p>
+                      <a:pPr>
+                        <a:defRPr sz="1600" b="0">
+                          <a:solidFill>
+                            <a:srgbClr val="17263D"/>
+                          </a:solidFill>
+                          <a:latin typeface="Microsoft YaHei"/>
+                        </a:defRPr>
+                      </a:pPr>
+                      <a:r>
+                        <a:t>-8.24个百分点</a:t>
+                      </a:r>
+                    </a:p>
+                  </a:txBody>
+                  <a:tcPr marL="118872" marR="118872" marT="91440" marB="54864">
+                    <a:solidFill>
+                      <a:srgbClr val="FFFFFF"/>
+                    </a:solidFill>
+                  </a:tcPr>
+                </a:tc>
+              </a:tr>
+              <a:tr h="976121">
+                <a:tc>
+                  <a:txBody>
+                    <a:bodyPr/>
+                    <a:lstStyle/>
+                    <a:p>
+                      <a:pPr>
+                        <a:defRPr sz="1600" b="0">
+                          <a:solidFill>
+                            <a:srgbClr val="17263D"/>
+                          </a:solidFill>
+                          <a:latin typeface="Microsoft YaHei"/>
+                        </a:defRPr>
+                      </a:pPr>
+                      <a:r>
+                        <a:t>F@15mm ↑</a:t>
+                      </a:r>
+                    </a:p>
+                  </a:txBody>
+                  <a:tcPr marL="118872" marR="118872" marT="91440" marB="54864">
+                    <a:solidFill>
+                      <a:srgbClr val="E8EEF5"/>
+                    </a:solidFill>
+                  </a:tcPr>
+                </a:tc>
+                <a:tc>
+                  <a:txBody>
+                    <a:bodyPr/>
+                    <a:lstStyle/>
+                    <a:p>
+                      <a:pPr>
+                        <a:defRPr sz="1600" b="0">
+                          <a:solidFill>
+                            <a:srgbClr val="17263D"/>
+                          </a:solidFill>
+                          <a:latin typeface="Microsoft YaHei"/>
+                        </a:defRPr>
+                      </a:pPr>
+                      <a:r>
+                        <a:t>97.47%</a:t>
+                      </a:r>
+                    </a:p>
+                  </a:txBody>
+                  <a:tcPr marL="118872" marR="118872" marT="91440" marB="54864">
+                    <a:solidFill>
+                      <a:srgbClr val="E8EEF5"/>
+                    </a:solidFill>
+                  </a:tcPr>
+                </a:tc>
+                <a:tc>
+                  <a:txBody>
+                    <a:bodyPr/>
+                    <a:lstStyle/>
+                    <a:p>
+                      <a:pPr>
+                        <a:defRPr sz="1600" b="0">
+                          <a:solidFill>
+                            <a:srgbClr val="17263D"/>
+                          </a:solidFill>
+                          <a:latin typeface="Microsoft YaHei"/>
+                        </a:defRPr>
+                      </a:pPr>
+                      <a:r>
+                        <a:t>95.83%</a:t>
+                      </a:r>
+                    </a:p>
+                  </a:txBody>
+                  <a:tcPr marL="118872" marR="118872" marT="91440" marB="54864">
+                    <a:solidFill>
+                      <a:srgbClr val="E8EEF5"/>
+                    </a:solidFill>
+                  </a:tcPr>
+                </a:tc>
+                <a:tc>
+                  <a:txBody>
+                    <a:bodyPr/>
+                    <a:lstStyle/>
+                    <a:p>
+                      <a:pPr>
+                        <a:defRPr sz="1600" b="0">
+                          <a:solidFill>
+                            <a:srgbClr val="17263D"/>
+                          </a:solidFill>
+                          <a:latin typeface="Microsoft YaHei"/>
+                        </a:defRPr>
+                      </a:pPr>
+                      <a:r>
+                        <a:t>-1.64个百分点</a:t>
+                      </a:r>
+                    </a:p>
+                  </a:txBody>
+                  <a:tcPr marL="118872" marR="118872" marT="91440" marB="54864">
+                    <a:solidFill>
+                      <a:srgbClr val="E8EEF5"/>
+                    </a:solidFill>
+                  </a:tcPr>
+                </a:tc>
+              </a:tr>
+            </a:tbl>
+          </a:graphicData>
+        </a:graphic>
+      </p:graphicFrame>
+      <p:sp>
+        <p:nvSpPr>
+          <p:cNvPr id="5" name="TextBox 4"/>
+          <p:cNvSpPr txBox="1"/>
+          <p:nvPr/>
+        </p:nvSpPr>
+        <p:spPr>
+          <a:xfrm>
+            <a:off x="457200" y="6053328"/>
+            <a:ext cx="11247120" cy="402336"/>
+          </a:xfrm>
+          <a:prstGeom prst="rect">
+            <a:avLst/>
+          </a:prstGeom>
+          <a:noFill/>
+        </p:spPr>
+        <p:txBody>
+          <a:bodyPr wrap="square" lIns="0" rIns="0" tIns="0" bIns="0">
+            <a:spAutoFit/>
+          </a:bodyPr>
+          <a:lstStyle/>
+          <a:p>
+            <a:pPr>
+              <a:defRPr sz="1200" b="0">
+                <a:solidFill>
+                  <a:srgbClr val="52637A"/>
+                </a:solidFill>
+                <a:latin typeface="Microsoft YaHei"/>
+              </a:defRPr>
+            </a:pPr>
+            <a:r>
+              <a:t>同一3960张官方评测图、裁剪元数据、FP32、无增强；PA-MPJPE增加18.3%。两个固定checkpoint，未用测试集选模。</a:t>
+            </a:r>
+          </a:p>
+        </p:txBody>
+      </p:sp>
+      <p:sp>
+        <p:nvSpPr>
+          <p:cNvPr id="6" name="TextBox 5"/>
+          <p:cNvSpPr txBox="1"/>
+          <p:nvPr/>
+        </p:nvSpPr>
+        <p:spPr>
+          <a:xfrm>
+            <a:off x="457200" y="6492240"/>
+            <a:ext cx="10789920" cy="210312"/>
+          </a:xfrm>
+          <a:prstGeom prst="rect">
+            <a:avLst/>
+          </a:prstGeom>
+          <a:noFill/>
+        </p:spPr>
+        <p:txBody>
+          <a:bodyPr wrap="square" lIns="0" rIns="0" tIns="0" bIns="0">
+            <a:spAutoFit/>
+          </a:bodyPr>
+          <a:lstStyle/>
+          <a:p>
+            <a:pPr>
+              <a:defRPr sz="1000" b="0">
+                <a:solidFill>
+                  <a:srgbClr val="007E87"/>
+                </a:solidFill>
+                <a:latin typeface="Microsoft YaHei"/>
+              </a:defRPr>
+            </a:pPr>
+            <a:r>
+              <a:t>来源：evaluation/selftrained_vs_freihand_epoch50/{comparison,provenance}.json</a:t>
+            </a:r>
+          </a:p>
+        </p:txBody>
+      </p:sp>
+      <p:sp>
+        <p:nvSpPr>
+          <p:cNvPr id="7" name="TextBox 6"/>
+          <p:cNvSpPr txBox="1"/>
+          <p:nvPr/>
+        </p:nvSpPr>
+        <p:spPr>
+          <a:xfrm>
+            <a:off x="11247120" y="6464808"/>
+            <a:ext cx="457200" cy="274320"/>
+          </a:xfrm>
+          <a:prstGeom prst="rect">
+            <a:avLst/>
+          </a:prstGeom>
+          <a:noFill/>
+        </p:spPr>
+        <p:txBody>
+          <a:bodyPr wrap="square" lIns="0" rIns="0" tIns="0" bIns="0">
+            <a:spAutoFit/>
+          </a:bodyPr>
+          <a:lstStyle/>
+          <a:p>
+            <a:pPr>
+              <a:defRPr sz="1100" b="0">
+                <a:solidFill>
+                  <a:srgbClr val="52637A"/>
+                </a:solidFill>
+                <a:latin typeface="Microsoft YaHei"/>
+              </a:defRPr>
+            </a:pPr>
+            <a:r>
+              <a:t>34</a:t>
+            </a:r>
+          </a:p>
+        </p:txBody>
+      </p:sp>
+    </p:spTree>
+  </p:cSld>
+  <p:clrMapOvr>
+    <a:masterClrMapping/>
+  </p:clrMapOvr>
+</p:sld>
+</file>
+
+<file path=ppt/slides/slide35.xml><?xml version="1.0" encoding="utf-8"?>
+<p:sld xmlns:a="http://schemas.openxmlformats.org/drawingml/2006/main" xmlns:p="http://schemas.openxmlformats.org/presentationml/2006/main" xmlns:r="http://schemas.openxmlformats.org/officeDocument/2006/relationships">
+  <p:cSld>
+    <p:bg>
+      <p:bgPr>
+        <a:solidFill>
+          <a:srgbClr val="F4F7FB"/>
+        </a:solidFill>
+        <a:effectLst/>
+      </p:bgPr>
+    </p:bg>
+    <p:spTree>
+      <p:nvGrpSpPr>
+        <p:cNvPr id="1" name=""/>
+        <p:cNvGrpSpPr/>
+        <p:nvPr/>
+      </p:nvGrpSpPr>
+      <p:grpSpPr/>
+      <p:sp>
+        <p:nvSpPr>
+          <p:cNvPr id="2" name="TextBox 1"/>
+          <p:cNvSpPr txBox="1"/>
+          <p:nvPr/>
+        </p:nvSpPr>
+        <p:spPr>
+          <a:xfrm>
+            <a:off x="457200" y="228600"/>
+            <a:ext cx="11247120" cy="502920"/>
+          </a:xfrm>
+          <a:prstGeom prst="rect">
+            <a:avLst/>
+          </a:prstGeom>
+          <a:noFill/>
+        </p:spPr>
+        <p:txBody>
+          <a:bodyPr wrap="square" lIns="0" rIns="0" tIns="0" bIns="0">
+            <a:spAutoFit/>
+          </a:bodyPr>
+          <a:lstStyle/>
+          <a:p>
+            <a:pPr>
+              <a:defRPr sz="2800" b="1">
+                <a:solidFill>
+                  <a:srgbClr val="17263D"/>
+                </a:solidFill>
+                <a:latin typeface="Microsoft YaHei"/>
+              </a:defRPr>
+            </a:pPr>
+            <a:r>
+              <a:t>结果解读：尚不能归因于单一改动</a:t>
+            </a:r>
+          </a:p>
+        </p:txBody>
+      </p:sp>
+      <p:sp>
+        <p:nvSpPr>
+          <p:cNvPr id="3" name="TextBox 2"/>
+          <p:cNvSpPr txBox="1"/>
+          <p:nvPr/>
+        </p:nvSpPr>
+        <p:spPr>
+          <a:xfrm>
+            <a:off x="457200" y="868680"/>
+            <a:ext cx="11247120" cy="411480"/>
+          </a:xfrm>
+          <a:prstGeom prst="rect">
+            <a:avLst/>
+          </a:prstGeom>
+          <a:noFill/>
+        </p:spPr>
+        <p:txBody>
+          <a:bodyPr wrap="square" lIns="0" rIns="0" tIns="0" bIns="0">
+            <a:spAutoFit/>
+          </a:bodyPr>
+          <a:lstStyle/>
+          <a:p>
+            <a:pPr>
+              <a:defRPr sz="1500" b="0">
+                <a:solidFill>
+                  <a:srgbClr val="52637A"/>
+                </a:solidFill>
+                <a:latin typeface="Microsoft YaHei"/>
+              </a:defRPr>
+            </a:pPr>
+            <a:r>
+              <a:t>本机实际运行记录｜更新于 2026-10-15 18:46 EDT</a:t>
+            </a:r>
+          </a:p>
+        </p:txBody>
+      </p:sp>
+      <p:graphicFrame>
+        <p:nvGraphicFramePr>
+          <p:cNvPr id="4" name="Table 3"/>
+          <p:cNvGraphicFramePr>
+            <a:graphicFrameLocks noGrp="1"/>
+          </p:cNvGraphicFramePr>
+          <p:nvPr/>
+        </p:nvGraphicFramePr>
+        <p:xfrm>
+          <a:off x="457200" y="1508760"/>
+          <a:ext cx="11274552" cy="4434837"/>
+        </p:xfrm>
+        <a:graphic>
+          <a:graphicData uri="http://schemas.openxmlformats.org/drawingml/2006/table">
+            <a:tbl>
+              <a:tblPr firstRow="1" bandRow="1">
+                <a:tableStyleId>{5C22544A-7EE6-4342-B048-85BDC9FD1C3A}</a:tableStyleId>
+              </a:tblPr>
+              <a:tblGrid>
+                <a:gridCol w="2834640"/>
+                <a:gridCol w="8439912"/>
+              </a:tblGrid>
+              <a:tr h="530352">
+                <a:tc>
+                  <a:txBody>
+                    <a:bodyPr/>
+                    <a:lstStyle/>
+                    <a:p>
+                      <a:pPr>
+                        <a:defRPr sz="1700" b="1">
+                          <a:solidFill>
+                            <a:srgbClr val="FFFFFF"/>
+                          </a:solidFill>
+                          <a:latin typeface="Microsoft YaHei"/>
+                        </a:defRPr>
+                      </a:pPr>
+                      <a:r>
+                        <a:t>观察</a:t>
+                      </a:r>
+                    </a:p>
+                  </a:txBody>
+                  <a:tcPr marL="118872" marR="118872" marT="91440" marB="54864">
+                    <a:solidFill>
+                      <a:srgbClr val="007E87"/>
+                    </a:solidFill>
+                  </a:tcPr>
+                </a:tc>
+                <a:tc>
+                  <a:txBody>
+                    <a:bodyPr/>
+                    <a:lstStyle/>
+                    <a:p>
+                      <a:pPr>
+                        <a:defRPr sz="1700" b="1">
+                          <a:solidFill>
+                            <a:srgbClr val="FFFFFF"/>
+                          </a:solidFill>
+                          <a:latin typeface="Microsoft YaHei"/>
+                        </a:defRPr>
+                      </a:pPr>
+                      <a:r>
+                        <a:t>可支持的结论</a:t>
+                      </a:r>
+                    </a:p>
+                  </a:txBody>
+                  <a:tcPr marL="118872" marR="118872" marT="91440" marB="54864">
+                    <a:solidFill>
+                      <a:srgbClr val="007E87"/>
+                    </a:solidFill>
+                  </a:tcPr>
+                </a:tc>
+              </a:tr>
+              <a:tr h="780897">
+                <a:tc>
+                  <a:txBody>
+                    <a:bodyPr/>
+                    <a:lstStyle/>
+                    <a:p>
+                      <a:pPr>
+                        <a:defRPr sz="1700" b="0">
+                          <a:solidFill>
+                            <a:srgbClr val="17263D"/>
+                          </a:solidFill>
+                          <a:latin typeface="Microsoft YaHei"/>
+                        </a:defRPr>
+                      </a:pPr>
+                      <a:r>
+                        <a:t>batch增大约42.7倍</a:t>
+                      </a:r>
+                    </a:p>
+                  </a:txBody>
+                  <a:tcPr marL="118872" marR="118872" marT="91440" marB="54864">
+                    <a:solidFill>
+                      <a:srgbClr val="FFFFFF"/>
+                    </a:solidFill>
+                  </a:tcPr>
+                </a:tc>
+                <a:tc>
+                  <a:txBody>
+                    <a:bodyPr/>
+                    <a:lstStyle/>
+                    <a:p>
+                      <a:pPr>
+                        <a:defRPr sz="1700" b="0">
+                          <a:solidFill>
+                            <a:srgbClr val="17263D"/>
+                          </a:solidFill>
+                          <a:latin typeface="Microsoft YaHei"/>
+                        </a:defRPr>
+                      </a:pPr>
+                      <a:r>
+                        <a:t>更新只有旧模型的约1/8.8；本次50轮约583.7万次图像输入。</a:t>
+                      </a:r>
+                    </a:p>
+                  </a:txBody>
+                  <a:tcPr marL="118872" marR="118872" marT="91440" marB="54864">
+                    <a:solidFill>
+                      <a:srgbClr val="FFFFFF"/>
+                    </a:solidFill>
+                  </a:tcPr>
+                </a:tc>
+              </a:tr>
+              <a:tr h="780897">
+                <a:tc>
+                  <a:txBody>
+                    <a:bodyPr/>
+                    <a:lstStyle/>
+                    <a:p>
+                      <a:pPr>
+                        <a:defRPr sz="1700" b="0">
+                          <a:solidFill>
+                            <a:srgbClr val="17263D"/>
+                          </a:solidFill>
+                          <a:latin typeface="Microsoft YaHei"/>
+                        </a:defRPr>
+                      </a:pPr>
+                      <a:r>
+                        <a:t>loss相对尺度改变</a:t>
+                      </a:r>
+                    </a:p>
+                  </a:txBody>
+                  <a:tcPr marL="118872" marR="118872" marT="91440" marB="54864">
+                    <a:solidFill>
+                      <a:srgbClr val="E8EEF5"/>
+                    </a:solidFill>
+                  </a:tcPr>
+                </a:tc>
+                <a:tc>
+                  <a:txBody>
+                    <a:bodyPr/>
+                    <a:lstStyle/>
+                    <a:p>
+                      <a:pPr>
+                        <a:defRPr sz="1700" b="0">
+                          <a:solidFill>
+                            <a:srgbClr val="17263D"/>
+                          </a:solidFill>
+                          <a:latin typeface="Microsoft YaHei"/>
+                        </a:defRPr>
+                      </a:pPr>
+                      <a:r>
+                        <a:t>监督项参考batch从8变为128；对抗项仍取平均，优化行为不同。</a:t>
+                      </a:r>
+                    </a:p>
+                  </a:txBody>
+                  <a:tcPr marL="118872" marR="118872" marT="91440" marB="54864">
+                    <a:solidFill>
+                      <a:srgbClr val="E8EEF5"/>
+                    </a:solidFill>
+                  </a:tcPr>
+                </a:tc>
+              </a:tr>
+              <a:tr h="780897">
+                <a:tc>
+                  <a:txBody>
+                    <a:bodyPr/>
+                    <a:lstStyle/>
+                    <a:p>
+                      <a:pPr>
+                        <a:defRPr sz="1700" b="0">
+                          <a:solidFill>
+                            <a:srgbClr val="17263D"/>
+                          </a:solidFill>
+                          <a:latin typeface="Microsoft YaHei"/>
+                        </a:defRPr>
+                      </a:pPr>
+                      <a:r>
+                        <a:t>训练 / 内部验证接近</a:t>
+                      </a:r>
+                    </a:p>
+                  </a:txBody>
+                  <a:tcPr marL="118872" marR="118872" marT="91440" marB="54864">
+                    <a:solidFill>
+                      <a:srgbClr val="FFFFFF"/>
+                    </a:solidFill>
+                  </a:tcPr>
+                </a:tc>
+                <a:tc>
+                  <a:txBody>
+                    <a:bodyPr/>
+                    <a:lstStyle/>
+                    <a:p>
+                      <a:pPr>
+                        <a:defRPr sz="1700" b="0">
+                          <a:solidFill>
+                            <a:srgbClr val="17263D"/>
+                          </a:solidFill>
+                          <a:latin typeface="Microsoft YaHei"/>
+                        </a:defRPr>
+                      </a:pPr>
+                      <a:r>
+                        <a:t>本次PA-MPJPE为8.02 / 8.09 mm；没有明显内部过拟合迹象。</a:t>
+                      </a:r>
+                    </a:p>
+                  </a:txBody>
+                  <a:tcPr marL="118872" marR="118872" marT="91440" marB="54864">
+                    <a:solidFill>
+                      <a:srgbClr val="FFFFFF"/>
+                    </a:solidFill>
+                  </a:tcPr>
+                </a:tc>
+              </a:tr>
+              <a:tr h="780897">
+                <a:tc>
+                  <a:txBody>
+                    <a:bodyPr/>
+                    <a:lstStyle/>
+                    <a:p>
+                      <a:pPr>
+                        <a:defRPr sz="1700" b="0">
+                          <a:solidFill>
+                            <a:srgbClr val="17263D"/>
+                          </a:solidFill>
+                          <a:latin typeface="Microsoft YaHei"/>
+                        </a:defRPr>
+                      </a:pPr>
+                      <a:r>
+                        <a:t>正式测试与内部验证不同</a:t>
+                      </a:r>
+                    </a:p>
+                  </a:txBody>
+                  <a:tcPr marL="118872" marR="118872" marT="91440" marB="54864">
+                    <a:solidFill>
+                      <a:srgbClr val="E8EEF5"/>
+                    </a:solidFill>
+                  </a:tcPr>
+                </a:tc>
+                <a:tc>
+                  <a:txBody>
+                    <a:bodyPr/>
+                    <a:lstStyle/>
+                    <a:p>
+                      <a:pPr>
+                        <a:defRPr sz="1700" b="0">
+                          <a:solidFill>
+                            <a:srgbClr val="17263D"/>
+                          </a:solidFill>
+                          <a:latin typeface="Microsoft YaHei"/>
+                        </a:defRPr>
+                      </a:pPr>
+                      <a:r>
+                        <a:t>本次官方测试9.395 mm；不能拿内部8.09 mm直接和旧测试比较。</a:t>
+                      </a:r>
+                    </a:p>
+                  </a:txBody>
+                  <a:tcPr marL="118872" marR="118872" marT="91440" marB="54864">
+                    <a:solidFill>
+                      <a:srgbClr val="E8EEF5"/>
+                    </a:solidFill>
+                  </a:tcPr>
+                </a:tc>
+              </a:tr>
+              <a:tr h="780897">
+                <a:tc>
+                  <a:txBody>
+                    <a:bodyPr/>
+                    <a:lstStyle/>
+                    <a:p>
+                      <a:pPr>
+                        <a:defRPr sz="1700" b="0">
+                          <a:solidFill>
+                            <a:srgbClr val="17263D"/>
+                          </a:solidFill>
+                          <a:latin typeface="Microsoft YaHei"/>
+                        </a:defRPr>
+                      </a:pPr>
+                      <a:r>
+                        <a:t>结论与后续验证</a:t>
+                      </a:r>
+                    </a:p>
+                  </a:txBody>
+                  <a:tcPr marL="118872" marR="118872" marT="91440" marB="54864">
+                    <a:solidFill>
+                      <a:srgbClr val="FFFFFF"/>
+                    </a:solidFill>
+                  </a:tcPr>
+                </a:tc>
+                <a:tc>
+                  <a:txBody>
+                    <a:bodyPr/>
+                    <a:lstStyle/>
+                    <a:p>
+                      <a:pPr>
+                        <a:defRPr sz="1700" b="0">
+                          <a:solidFill>
+                            <a:srgbClr val="17263D"/>
+                          </a:solidFill>
+                          <a:latin typeface="Microsoft YaHei"/>
+                        </a:defRPr>
+                      </a:pPr>
+                      <a:r>
+                        <a:t>旧checkpoint目前更好；需控制划分、loss尺度与更新预算分别验证。</a:t>
+                      </a:r>
+                    </a:p>
+                  </a:txBody>
+                  <a:tcPr marL="118872" marR="118872" marT="91440" marB="54864">
+                    <a:solidFill>
+                      <a:srgbClr val="FFFFFF"/>
+                    </a:solidFill>
+                  </a:tcPr>
+                </a:tc>
+              </a:tr>
+            </a:tbl>
+          </a:graphicData>
+        </a:graphic>
+      </p:graphicFrame>
+      <p:sp>
+        <p:nvSpPr>
+          <p:cNvPr id="5" name="TextBox 4"/>
+          <p:cNvSpPr txBox="1"/>
+          <p:nvPr/>
+        </p:nvSpPr>
+        <p:spPr>
+          <a:xfrm>
+            <a:off x="457200" y="6053328"/>
+            <a:ext cx="11247120" cy="402336"/>
+          </a:xfrm>
+          <a:prstGeom prst="rect">
+            <a:avLst/>
+          </a:prstGeom>
+          <a:noFill/>
+        </p:spPr>
+        <p:txBody>
+          <a:bodyPr wrap="square" lIns="0" rIns="0" tIns="0" bIns="0">
+            <a:spAutoFit/>
+          </a:bodyPr>
+          <a:lstStyle/>
+          <a:p>
+            <a:pPr>
+              <a:defRPr sz="1200" b="0">
+                <a:solidFill>
+                  <a:srgbClr val="52637A"/>
+                </a:solidFill>
+                <a:latin typeface="Microsoft YaHei"/>
+              </a:defRPr>
+            </a:pPr>
+            <a:r>
+              <a:t>继续训练能否超过旧模型尚未验证。多项条件同时变化，本次对比不是单变量消融实验。</a:t>
+            </a:r>
+          </a:p>
+        </p:txBody>
+      </p:sp>
+      <p:sp>
+        <p:nvSpPr>
+          <p:cNvPr id="6" name="TextBox 5"/>
+          <p:cNvSpPr txBox="1"/>
+          <p:nvPr/>
+        </p:nvSpPr>
+        <p:spPr>
+          <a:xfrm>
+            <a:off x="457200" y="6492240"/>
+            <a:ext cx="10789920" cy="210312"/>
+          </a:xfrm>
+          <a:prstGeom prst="rect">
+            <a:avLst/>
+          </a:prstGeom>
+          <a:noFill/>
+        </p:spPr>
+        <p:txBody>
+          <a:bodyPr wrap="square" lIns="0" rIns="0" tIns="0" bIns="0">
+            <a:spAutoFit/>
+          </a:bodyPr>
+          <a:lstStyle/>
+          <a:p>
+            <a:pPr>
+              <a:defRPr sz="1000" b="0">
+                <a:solidFill>
+                  <a:srgbClr val="007E87"/>
+                </a:solidFill>
+                <a:latin typeface="Microsoft YaHei"/>
+              </a:defRPr>
+            </a:pPr>
+            <a:r>
+              <a:t>来源：同口径comparison.json；reports/stopped_freihand_epoch50/metrics.json</a:t>
+            </a:r>
+          </a:p>
+        </p:txBody>
+      </p:sp>
+      <p:sp>
+        <p:nvSpPr>
+          <p:cNvPr id="7" name="TextBox 6"/>
+          <p:cNvSpPr txBox="1"/>
+          <p:nvPr/>
+        </p:nvSpPr>
+        <p:spPr>
+          <a:xfrm>
+            <a:off x="11247120" y="6464808"/>
+            <a:ext cx="457200" cy="274320"/>
+          </a:xfrm>
+          <a:prstGeom prst="rect">
+            <a:avLst/>
+          </a:prstGeom>
+          <a:noFill/>
+        </p:spPr>
+        <p:txBody>
+          <a:bodyPr wrap="square" lIns="0" rIns="0" tIns="0" bIns="0">
+            <a:spAutoFit/>
+          </a:bodyPr>
+          <a:lstStyle/>
+          <a:p>
+            <a:pPr>
+              <a:defRPr sz="1100" b="0">
+                <a:solidFill>
+                  <a:srgbClr val="52637A"/>
+                </a:solidFill>
+                <a:latin typeface="Microsoft YaHei"/>
+              </a:defRPr>
+            </a:pPr>
+            <a:r>
+              <a:t>35</a:t>
+            </a:r>
+          </a:p>
+        </p:txBody>
+      </p:sp>
+    </p:spTree>
+  </p:cSld>
+  <p:clrMapOvr>
+    <a:masterClrMapping/>
+  </p:clrMapOvr>
+</p:sld>
+</file>
+
+<file path=ppt/slides/slide36.xml><?xml version="1.0" encoding="utf-8"?>
+<p:sld xmlns:a="http://schemas.openxmlformats.org/drawingml/2006/main" xmlns:p="http://schemas.openxmlformats.org/presentationml/2006/main" xmlns:r="http://schemas.openxmlformats.org/officeDocument/2006/relationships">
+  <p:cSld>
+    <p:bg>
+      <p:bgPr>
+        <a:solidFill>
+          <a:srgbClr val="F4F7FB"/>
+        </a:solidFill>
+        <a:effectLst/>
+      </p:bgPr>
+    </p:bg>
+    <p:spTree>
+      <p:nvGrpSpPr>
+        <p:cNvPr id="1" name=""/>
+        <p:cNvGrpSpPr/>
+        <p:nvPr/>
+      </p:nvGrpSpPr>
+      <p:grpSpPr/>
+      <p:sp>
+        <p:nvSpPr>
+          <p:cNvPr id="2" name="TextBox 1"/>
+          <p:cNvSpPr txBox="1"/>
+          <p:nvPr/>
+        </p:nvSpPr>
+        <p:spPr>
+          <a:xfrm>
+            <a:off x="457200" y="228600"/>
+            <a:ext cx="11247120" cy="548640"/>
+          </a:xfrm>
+          <a:prstGeom prst="rect">
+            <a:avLst/>
+          </a:prstGeom>
+          <a:noFill/>
+        </p:spPr>
+        <p:txBody>
+          <a:bodyPr wrap="square">
+            <a:spAutoFit/>
+          </a:bodyPr>
+          <a:lstStyle/>
+          <a:p>
+            <a:pPr>
+              <a:defRPr sz="2700" b="1">
+                <a:solidFill>
+                  <a:srgbClr val="17263D"/>
+                </a:solidFill>
+                <a:latin typeface="Microsoft YaHei"/>
+              </a:defRPr>
+            </a:pPr>
+            <a:r>
+              <a:t>手套基线｜数据与评测口径</a:t>
+            </a:r>
+          </a:p>
+        </p:txBody>
+      </p:sp>
+      <p:sp>
+        <p:nvSpPr>
+          <p:cNvPr id="3" name="TextBox 2"/>
+          <p:cNvSpPr txBox="1"/>
+          <p:nvPr/>
+        </p:nvSpPr>
+        <p:spPr>
+          <a:xfrm>
+            <a:off x="457200" y="896112"/>
+            <a:ext cx="11247120" cy="457200"/>
+          </a:xfrm>
+          <a:prstGeom prst="rect">
+            <a:avLst/>
+          </a:prstGeom>
+          <a:noFill/>
+        </p:spPr>
+        <p:txBody>
+          <a:bodyPr wrap="square">
+            <a:spAutoFit/>
+          </a:bodyPr>
+          <a:lstStyle/>
+          <a:p>
+            <a:pPr>
+              <a:defRPr sz="1500" b="0">
+                <a:solidFill>
+                  <a:srgbClr val="52637A"/>
+                </a:solidFill>
+                <a:latin typeface="Microsoft YaHei"/>
+              </a:defRPr>
+            </a:pPr>
+            <a:r>
+              <a:t>Ego Clinical Task → WiLoR 官方权重；本阶段尚未微调</a:t>
+            </a:r>
+          </a:p>
+        </p:txBody>
+      </p:sp>
+      <p:sp>
+        <p:nvSpPr>
+          <p:cNvPr id="4" name="TextBox 3"/>
+          <p:cNvSpPr txBox="1"/>
+          <p:nvPr/>
+        </p:nvSpPr>
+        <p:spPr>
+          <a:xfrm>
+            <a:off x="457200" y="6455664"/>
+            <a:ext cx="10789920" cy="274320"/>
+          </a:xfrm>
+          <a:prstGeom prst="rect">
+            <a:avLst/>
+          </a:prstGeom>
+          <a:noFill/>
+        </p:spPr>
+        <p:txBody>
+          <a:bodyPr wrap="square">
+            <a:spAutoFit/>
+          </a:bodyPr>
+          <a:lstStyle/>
+          <a:p>
+            <a:pPr>
+              <a:defRPr sz="1000" b="0">
+                <a:solidFill>
+                  <a:srgbClr val="007E87"/>
+                </a:solidFill>
+                <a:latin typeface="Microsoft YaHei"/>
+              </a:defRPr>
+            </a:pPr>
+            <a:r>
+              <a:t>来源：evaluation/ego_clinical_official_baseline/metrics.json、per_sample.csv 与预测对照图</a:t>
+            </a:r>
+          </a:p>
+        </p:txBody>
+      </p:sp>
+      <p:sp>
+        <p:nvSpPr>
+          <p:cNvPr id="5" name="TextBox 4"/>
+          <p:cNvSpPr txBox="1"/>
+          <p:nvPr/>
+        </p:nvSpPr>
+        <p:spPr>
+          <a:xfrm>
+            <a:off x="11247120" y="6455664"/>
+            <a:ext cx="457200" cy="274320"/>
+          </a:xfrm>
+          <a:prstGeom prst="rect">
+            <a:avLst/>
+          </a:prstGeom>
+          <a:noFill/>
+        </p:spPr>
+        <p:txBody>
+          <a:bodyPr wrap="square">
+            <a:spAutoFit/>
+          </a:bodyPr>
+          <a:lstStyle/>
+          <a:p>
+            <a:pPr>
+              <a:defRPr sz="1100" b="0">
+                <a:solidFill>
+                  <a:srgbClr val="17263D"/>
+                </a:solidFill>
+                <a:latin typeface="Microsoft YaHei"/>
+              </a:defRPr>
+            </a:pPr>
+            <a:r>
+              <a:t>36</a:t>
+            </a:r>
+          </a:p>
+        </p:txBody>
+      </p:sp>
+      <p:graphicFrame>
+        <p:nvGraphicFramePr>
+          <p:cNvPr id="6" name="Table 5"/>
+          <p:cNvGraphicFramePr>
+            <a:graphicFrameLocks noGrp="1"/>
+          </p:cNvGraphicFramePr>
+          <p:nvPr/>
+        </p:nvGraphicFramePr>
+        <p:xfrm>
+          <a:off x="502920" y="1554480"/>
+          <a:ext cx="11155680" cy="2468880"/>
+        </p:xfrm>
+        <a:graphic>
+          <a:graphicData uri="http://schemas.openxmlformats.org/drawingml/2006/table">
+            <a:tbl>
+              <a:tblPr firstRow="1" bandRow="1">
+                <a:tableStyleId>{5C22544A-7EE6-4342-B048-85BDC9FD1C3A}</a:tableStyleId>
+              </a:tblPr>
+              <a:tblGrid>
+                <a:gridCol w="3718560"/>
+                <a:gridCol w="3718560"/>
+                <a:gridCol w="3718560"/>
+              </a:tblGrid>
+              <a:tr h="617220">
+                <a:tc>
+                  <a:txBody>
+                    <a:bodyPr/>
+                    <a:lstStyle/>
+                    <a:p>
+                      <a:pPr>
+                        <a:defRPr sz="1800">
+                          <a:solidFill>
+                            <a:srgbClr val="FFFFFF"/>
+                          </a:solidFill>
+                          <a:latin typeface="Microsoft YaHei"/>
+                        </a:defRPr>
+                      </a:pPr>
+                      <a:r>
+                        <a:t>集合</a:t>
+                      </a:r>
+                    </a:p>
+                  </a:txBody>
+                  <a:tcPr>
+                    <a:solidFill>
+                      <a:srgbClr val="007E87"/>
+                    </a:solidFill>
+                  </a:tcPr>
+                </a:tc>
+                <a:tc>
+                  <a:txBody>
+                    <a:bodyPr/>
+                    <a:lstStyle/>
+                    <a:p>
+                      <a:pPr>
+                        <a:defRPr sz="1800">
+                          <a:solidFill>
+                            <a:srgbClr val="FFFFFF"/>
+                          </a:solidFill>
+                          <a:latin typeface="Microsoft YaHei"/>
+                        </a:defRPr>
+                      </a:pPr>
+                      <a:r>
+                        <a:t>录像数</a:t>
+                      </a:r>
+                    </a:p>
+                  </a:txBody>
+                  <a:tcPr>
+                    <a:solidFill>
+                      <a:srgbClr val="007E87"/>
+                    </a:solidFill>
+                  </a:tcPr>
+                </a:tc>
+                <a:tc>
+                  <a:txBody>
+                    <a:bodyPr/>
+                    <a:lstStyle/>
+                    <a:p>
+                      <a:pPr>
+                        <a:defRPr sz="1800">
+                          <a:solidFill>
+                            <a:srgbClr val="FFFFFF"/>
+                          </a:solidFill>
+                          <a:latin typeface="Microsoft YaHei"/>
+                        </a:defRPr>
+                      </a:pPr>
+                      <a:r>
+                        <a:t>手部样本</a:t>
+                      </a:r>
+                    </a:p>
+                  </a:txBody>
+                  <a:tcPr>
+                    <a:solidFill>
+                      <a:srgbClr val="007E87"/>
+                    </a:solidFill>
+                  </a:tcPr>
+                </a:tc>
+              </a:tr>
+              <a:tr h="617220">
+                <a:tc>
+                  <a:txBody>
+                    <a:bodyPr/>
+                    <a:lstStyle/>
+                    <a:p>
+                      <a:pPr>
+                        <a:defRPr sz="1800">
+                          <a:solidFill>
+                            <a:srgbClr val="17263D"/>
+                          </a:solidFill>
+                          <a:latin typeface="Microsoft YaHei"/>
+                        </a:defRPr>
+                      </a:pPr>
+                      <a:r>
+                        <a:t>训练</a:t>
+                      </a:r>
+                    </a:p>
+                  </a:txBody>
+                  <a:tcPr>
+                    <a:solidFill>
+                      <a:srgbClr val="FFFFFF"/>
+                    </a:solidFill>
+                  </a:tcPr>
+                </a:tc>
+                <a:tc>
+                  <a:txBody>
+                    <a:bodyPr/>
+                    <a:lstStyle/>
+                    <a:p>
+                      <a:pPr>
+                        <a:defRPr sz="1800">
+                          <a:solidFill>
+                            <a:srgbClr val="17263D"/>
+                          </a:solidFill>
+                          <a:latin typeface="Microsoft YaHei"/>
+                        </a:defRPr>
+                      </a:pPr>
+                      <a:r>
+                        <a:t>20</a:t>
+                      </a:r>
+                    </a:p>
+                  </a:txBody>
+                  <a:tcPr>
+                    <a:solidFill>
+                      <a:srgbClr val="FFFFFF"/>
+                    </a:solidFill>
+                  </a:tcPr>
+                </a:tc>
+                <a:tc>
+                  <a:txBody>
+                    <a:bodyPr/>
+                    <a:lstStyle/>
+                    <a:p>
+                      <a:pPr>
+                        <a:defRPr sz="1800">
+                          <a:solidFill>
+                            <a:srgbClr val="17263D"/>
+                          </a:solidFill>
+                          <a:latin typeface="Microsoft YaHei"/>
+                        </a:defRPr>
+                      </a:pPr>
+                      <a:r>
+                        <a:t>3134</a:t>
+                      </a:r>
+                    </a:p>
+                  </a:txBody>
+                  <a:tcPr>
+                    <a:solidFill>
+                      <a:srgbClr val="FFFFFF"/>
+                    </a:solidFill>
+                  </a:tcPr>
+                </a:tc>
+              </a:tr>
+              <a:tr h="617220">
+                <a:tc>
+                  <a:txBody>
+                    <a:bodyPr/>
+                    <a:lstStyle/>
+                    <a:p>
+                      <a:pPr>
+                        <a:defRPr sz="1800">
+                          <a:solidFill>
+                            <a:srgbClr val="17263D"/>
+                          </a:solidFill>
+                          <a:latin typeface="Microsoft YaHei"/>
+                        </a:defRPr>
+                      </a:pPr>
+                      <a:r>
+                        <a:t>验证（本次评测）</a:t>
+                      </a:r>
+                    </a:p>
+                  </a:txBody>
+                  <a:tcPr>
+                    <a:solidFill>
+                      <a:srgbClr val="E8EEF5"/>
+                    </a:solidFill>
+                  </a:tcPr>
+                </a:tc>
+                <a:tc>
+                  <a:txBody>
+                    <a:bodyPr/>
+                    <a:lstStyle/>
+                    <a:p>
+                      <a:pPr>
+                        <a:defRPr sz="1800">
+                          <a:solidFill>
+                            <a:srgbClr val="17263D"/>
+                          </a:solidFill>
+                          <a:latin typeface="Microsoft YaHei"/>
+                        </a:defRPr>
+                      </a:pPr>
+                      <a:r>
+                        <a:t>3</a:t>
+                      </a:r>
+                    </a:p>
+                  </a:txBody>
+                  <a:tcPr>
+                    <a:solidFill>
+                      <a:srgbClr val="E8EEF5"/>
+                    </a:solidFill>
+                  </a:tcPr>
+                </a:tc>
+                <a:tc>
+                  <a:txBody>
+                    <a:bodyPr/>
+                    <a:lstStyle/>
+                    <a:p>
+                      <a:pPr>
+                        <a:defRPr sz="1800">
+                          <a:solidFill>
+                            <a:srgbClr val="17263D"/>
+                          </a:solidFill>
+                          <a:latin typeface="Microsoft YaHei"/>
+                        </a:defRPr>
+                      </a:pPr>
+                      <a:r>
+                        <a:t>372</a:t>
+                      </a:r>
+                    </a:p>
+                  </a:txBody>
+                  <a:tcPr>
+                    <a:solidFill>
+                      <a:srgbClr val="E8EEF5"/>
+                    </a:solidFill>
+                  </a:tcPr>
+                </a:tc>
+              </a:tr>
+              <a:tr h="617220">
+                <a:tc>
+                  <a:txBody>
+                    <a:bodyPr/>
+                    <a:lstStyle/>
+                    <a:p>
+                      <a:pPr>
+                        <a:defRPr sz="1800">
+                          <a:solidFill>
+                            <a:srgbClr val="17263D"/>
+                          </a:solidFill>
+                          <a:latin typeface="Microsoft YaHei"/>
+                        </a:defRPr>
+                      </a:pPr>
+                      <a:r>
+                        <a:t>测试（保留未评测）</a:t>
+                      </a:r>
+                    </a:p>
+                  </a:txBody>
+                  <a:tcPr>
+                    <a:solidFill>
+                      <a:srgbClr val="FFFFFF"/>
+                    </a:solidFill>
+                  </a:tcPr>
+                </a:tc>
+                <a:tc>
+                  <a:txBody>
+                    <a:bodyPr/>
+                    <a:lstStyle/>
+                    <a:p>
+                      <a:pPr>
+                        <a:defRPr sz="1800">
+                          <a:solidFill>
+                            <a:srgbClr val="17263D"/>
+                          </a:solidFill>
+                          <a:latin typeface="Microsoft YaHei"/>
+                        </a:defRPr>
+                      </a:pPr>
+                      <a:r>
+                        <a:t>3</a:t>
+                      </a:r>
+                    </a:p>
+                  </a:txBody>
+                  <a:tcPr>
+                    <a:solidFill>
+                      <a:srgbClr val="FFFFFF"/>
+                    </a:solidFill>
+                  </a:tcPr>
+                </a:tc>
+                <a:tc>
+                  <a:txBody>
+                    <a:bodyPr/>
+                    <a:lstStyle/>
+                    <a:p>
+                      <a:pPr>
+                        <a:defRPr sz="1800">
+                          <a:solidFill>
+                            <a:srgbClr val="17263D"/>
+                          </a:solidFill>
+                          <a:latin typeface="Microsoft YaHei"/>
+                        </a:defRPr>
+                      </a:pPr>
+                      <a:r>
+                        <a:t>398</a:t>
+                      </a:r>
+                    </a:p>
+                  </a:txBody>
+                  <a:tcPr>
+                    <a:solidFill>
+                      <a:srgbClr val="FFFFFF"/>
+                    </a:solidFill>
+                  </a:tcPr>
+                </a:tc>
+              </a:tr>
+            </a:tbl>
+          </a:graphicData>
+        </a:graphic>
+      </p:graphicFrame>
+      <p:sp>
+        <p:nvSpPr>
+          <p:cNvPr id="7" name="TextBox 6"/>
+          <p:cNvSpPr txBox="1"/>
+          <p:nvPr/>
+        </p:nvSpPr>
+        <p:spPr>
+          <a:xfrm>
+            <a:off x="594360" y="4206240"/>
+            <a:ext cx="10972800" cy="1737360"/>
+          </a:xfrm>
+          <a:prstGeom prst="rect">
+            <a:avLst/>
+          </a:prstGeom>
+          <a:noFill/>
+        </p:spPr>
+        <p:txBody>
+          <a:bodyPr wrap="square">
+            <a:spAutoFit/>
+          </a:bodyPr>
+          <a:lstStyle/>
+          <a:p>
+            <a:pPr>
+              <a:defRPr sz="1800" b="0">
+                <a:solidFill>
+                  <a:srgbClr val="17263D"/>
+                </a:solidFill>
+                <a:latin typeface="Microsoft YaHei"/>
+              </a:defRPr>
+            </a:pPr>
+            <a:r>
+              <a:t>26段录像、15,946帧；每6帧采样，按完整录像隔离。</a:t>
+            </a:r>
+          </a:p>
+          <a:p>
+            <a:pPr>
+              <a:defRPr sz="1800" b="0">
+                <a:solidFill>
+                  <a:srgbClr val="17263D"/>
+                </a:solidFill>
+                <a:latin typeface="Microsoft YaHei"/>
+              </a:defRPr>
+            </a:pPr>
+            <a:r>
+              <a:t>输入：参考标注生成手部框，256px裁剪；无增强，FP32。</a:t>
+            </a:r>
+          </a:p>
+          <a:p>
+            <a:pPr>
+              <a:defRPr sz="1800" b="0">
+                <a:solidFill>
+                  <a:srgbClr val="17263D"/>
+                </a:solidFill>
+                <a:latin typeface="Microsoft YaHei"/>
+              </a:defRPr>
+            </a:pPr>
+            <a:r>
+              <a:t>标签来自数据集MANO拟合；2D/3D关键点为派生标签，并非独立人工真值。</a:t>
+            </a:r>
+          </a:p>
+          <a:p>
+            <a:pPr>
+              <a:defRPr sz="1800" b="0">
+                <a:solidFill>
+                  <a:srgbClr val="17263D"/>
+                </a:solidFill>
+                <a:latin typeface="Microsoft YaHei"/>
+              </a:defRPr>
+            </a:pPr>
+            <a:r>
+              <a:t>左手形状存在毫米级兼容性差异；后续暂关闭左手betas监督。</a:t>
+            </a:r>
+          </a:p>
+        </p:txBody>
+      </p:sp>
+    </p:spTree>
+  </p:cSld>
+  <p:clrMapOvr>
+    <a:masterClrMapping/>
+  </p:clrMapOvr>
+</p:sld>
+</file>
+
+<file path=ppt/slides/slide37.xml><?xml version="1.0" encoding="utf-8"?>
+<p:sld xmlns:a="http://schemas.openxmlformats.org/drawingml/2006/main" xmlns:p="http://schemas.openxmlformats.org/presentationml/2006/main" xmlns:r="http://schemas.openxmlformats.org/officeDocument/2006/relationships">
+  <p:cSld>
+    <p:bg>
+      <p:bgPr>
+        <a:solidFill>
+          <a:srgbClr val="F4F7FB"/>
+        </a:solidFill>
+        <a:effectLst/>
+      </p:bgPr>
+    </p:bg>
+    <p:spTree>
+      <p:nvGrpSpPr>
+        <p:cNvPr id="1" name=""/>
+        <p:cNvGrpSpPr/>
+        <p:nvPr/>
+      </p:nvGrpSpPr>
+      <p:grpSpPr/>
+      <p:sp>
+        <p:nvSpPr>
+          <p:cNvPr id="2" name="TextBox 1"/>
+          <p:cNvSpPr txBox="1"/>
+          <p:nvPr/>
+        </p:nvSpPr>
+        <p:spPr>
+          <a:xfrm>
+            <a:off x="457200" y="228600"/>
+            <a:ext cx="11247120" cy="548640"/>
+          </a:xfrm>
+          <a:prstGeom prst="rect">
+            <a:avLst/>
+          </a:prstGeom>
+          <a:noFill/>
+        </p:spPr>
+        <p:txBody>
+          <a:bodyPr wrap="square">
+            <a:spAutoFit/>
+          </a:bodyPr>
+          <a:lstStyle/>
+          <a:p>
+            <a:pPr>
+              <a:defRPr sz="2700" b="1">
+                <a:solidFill>
+                  <a:srgbClr val="17263D"/>
+                </a:solidFill>
+                <a:latin typeface="Microsoft YaHei"/>
+              </a:defRPr>
+            </a:pPr>
+            <a:r>
+              <a:t>手套基线｜官方模型验证结果</a:t>
+            </a:r>
+          </a:p>
+        </p:txBody>
+      </p:sp>
+      <p:sp>
+        <p:nvSpPr>
+          <p:cNvPr id="3" name="TextBox 2"/>
+          <p:cNvSpPr txBox="1"/>
+          <p:nvPr/>
+        </p:nvSpPr>
+        <p:spPr>
+          <a:xfrm>
+            <a:off x="457200" y="896112"/>
+            <a:ext cx="11247120" cy="457200"/>
+          </a:xfrm>
+          <a:prstGeom prst="rect">
+            <a:avLst/>
+          </a:prstGeom>
+          <a:noFill/>
+        </p:spPr>
+        <p:txBody>
+          <a:bodyPr wrap="square">
+            <a:spAutoFit/>
+          </a:bodyPr>
+          <a:lstStyle/>
+          <a:p>
+            <a:pPr>
+              <a:defRPr sz="1500" b="0">
+                <a:solidFill>
+                  <a:srgbClr val="52637A"/>
+                </a:solidFill>
+                <a:latin typeface="Microsoft YaHei"/>
+              </a:defRPr>
+            </a:pPr>
+            <a:r>
+              <a:t>严格加载 wilor_final.ckpt；误差越低越好，不能与不同数据集数字直接比较</a:t>
+            </a:r>
+          </a:p>
+        </p:txBody>
+      </p:sp>
+      <p:sp>
+        <p:nvSpPr>
+          <p:cNvPr id="4" name="TextBox 3"/>
+          <p:cNvSpPr txBox="1"/>
+          <p:nvPr/>
+        </p:nvSpPr>
+        <p:spPr>
+          <a:xfrm>
+            <a:off x="457200" y="6455664"/>
+            <a:ext cx="10789920" cy="274320"/>
+          </a:xfrm>
+          <a:prstGeom prst="rect">
+            <a:avLst/>
+          </a:prstGeom>
+          <a:noFill/>
+        </p:spPr>
+        <p:txBody>
+          <a:bodyPr wrap="square">
+            <a:spAutoFit/>
+          </a:bodyPr>
+          <a:lstStyle/>
+          <a:p>
+            <a:pPr>
+              <a:defRPr sz="1000" b="0">
+                <a:solidFill>
+                  <a:srgbClr val="007E87"/>
+                </a:solidFill>
+                <a:latin typeface="Microsoft YaHei"/>
+              </a:defRPr>
+            </a:pPr>
+            <a:r>
+              <a:t>来源：evaluation/ego_clinical_official_baseline/metrics.json、per_sample.csv 与预测对照图</a:t>
+            </a:r>
+          </a:p>
+        </p:txBody>
+      </p:sp>
+      <p:sp>
+        <p:nvSpPr>
+          <p:cNvPr id="5" name="TextBox 4"/>
+          <p:cNvSpPr txBox="1"/>
+          <p:nvPr/>
+        </p:nvSpPr>
+        <p:spPr>
+          <a:xfrm>
+            <a:off x="11247120" y="6455664"/>
+            <a:ext cx="457200" cy="274320"/>
+          </a:xfrm>
+          <a:prstGeom prst="rect">
+            <a:avLst/>
+          </a:prstGeom>
+          <a:noFill/>
+        </p:spPr>
+        <p:txBody>
+          <a:bodyPr wrap="square">
+            <a:spAutoFit/>
+          </a:bodyPr>
+          <a:lstStyle/>
+          <a:p>
+            <a:pPr>
+              <a:defRPr sz="1100" b="0">
+                <a:solidFill>
+                  <a:srgbClr val="17263D"/>
+                </a:solidFill>
+                <a:latin typeface="Microsoft YaHei"/>
+              </a:defRPr>
+            </a:pPr>
+            <a:r>
+              <a:t>37</a:t>
+            </a:r>
+          </a:p>
+        </p:txBody>
+      </p:sp>
+      <p:graphicFrame>
+        <p:nvGraphicFramePr>
+          <p:cNvPr id="6" name="Table 5"/>
+          <p:cNvGraphicFramePr>
+            <a:graphicFrameLocks noGrp="1"/>
+          </p:cNvGraphicFramePr>
+          <p:nvPr/>
+        </p:nvGraphicFramePr>
+        <p:xfrm>
+          <a:off x="502920" y="1554480"/>
+          <a:ext cx="11155680" cy="2468880"/>
+        </p:xfrm>
+        <a:graphic>
+          <a:graphicData uri="http://schemas.openxmlformats.org/drawingml/2006/table">
+            <a:tbl>
+              <a:tblPr firstRow="1" bandRow="1">
+                <a:tableStyleId>{5C22544A-7EE6-4342-B048-85BDC9FD1C3A}</a:tableStyleId>
+              </a:tblPr>
+              <a:tblGrid>
+                <a:gridCol w="2788920"/>
+                <a:gridCol w="2788920"/>
+                <a:gridCol w="2788920"/>
+                <a:gridCol w="2788920"/>
+              </a:tblGrid>
+              <a:tr h="617220">
+                <a:tc>
+                  <a:txBody>
+                    <a:bodyPr/>
+                    <a:lstStyle/>
+                    <a:p>
+                      <a:pPr>
+                        <a:defRPr sz="1800">
+                          <a:solidFill>
+                            <a:srgbClr val="FFFFFF"/>
+                          </a:solidFill>
+                          <a:latin typeface="Microsoft YaHei"/>
+                        </a:defRPr>
+                      </a:pPr>
+                      <a:r>
+                        <a:t>范围</a:t>
+                      </a:r>
+                    </a:p>
+                  </a:txBody>
+                  <a:tcPr>
+                    <a:solidFill>
+                      <a:srgbClr val="007E87"/>
+                    </a:solidFill>
+                  </a:tcPr>
+                </a:tc>
+                <a:tc>
+                  <a:txBody>
+                    <a:bodyPr/>
+                    <a:lstStyle/>
+                    <a:p>
+                      <a:pPr>
+                        <a:defRPr sz="1800">
+                          <a:solidFill>
+                            <a:srgbClr val="FFFFFF"/>
+                          </a:solidFill>
+                          <a:latin typeface="Microsoft YaHei"/>
+                        </a:defRPr>
+                      </a:pPr>
+                      <a:r>
+                        <a:t>样本数</a:t>
+                      </a:r>
+                    </a:p>
+                  </a:txBody>
+                  <a:tcPr>
+                    <a:solidFill>
+                      <a:srgbClr val="007E87"/>
+                    </a:solidFill>
+                  </a:tcPr>
+                </a:tc>
+                <a:tc>
+                  <a:txBody>
+                    <a:bodyPr/>
+                    <a:lstStyle/>
+                    <a:p>
+                      <a:pPr>
+                        <a:defRPr sz="1800">
+                          <a:solidFill>
+                            <a:srgbClr val="FFFFFF"/>
+                          </a:solidFill>
+                          <a:latin typeface="Microsoft YaHei"/>
+                        </a:defRPr>
+                      </a:pPr>
+                      <a:r>
+                        <a:t>MPJPE / mm</a:t>
+                      </a:r>
+                    </a:p>
+                  </a:txBody>
+                  <a:tcPr>
+                    <a:solidFill>
+                      <a:srgbClr val="007E87"/>
+                    </a:solidFill>
+                  </a:tcPr>
+                </a:tc>
+                <a:tc>
+                  <a:txBody>
+                    <a:bodyPr/>
+                    <a:lstStyle/>
+                    <a:p>
+                      <a:pPr>
+                        <a:defRPr sz="1800">
+                          <a:solidFill>
+                            <a:srgbClr val="FFFFFF"/>
+                          </a:solidFill>
+                          <a:latin typeface="Microsoft YaHei"/>
+                        </a:defRPr>
+                      </a:pPr>
+                      <a:r>
+                        <a:t>PA-MPJPE / mm</a:t>
+                      </a:r>
+                    </a:p>
+                  </a:txBody>
+                  <a:tcPr>
+                    <a:solidFill>
+                      <a:srgbClr val="007E87"/>
+                    </a:solidFill>
+                  </a:tcPr>
+                </a:tc>
+              </a:tr>
+              <a:tr h="617220">
+                <a:tc>
+                  <a:txBody>
+                    <a:bodyPr/>
+                    <a:lstStyle/>
+                    <a:p>
+                      <a:pPr>
+                        <a:defRPr sz="1800">
+                          <a:solidFill>
+                            <a:srgbClr val="17263D"/>
+                          </a:solidFill>
+                          <a:latin typeface="Microsoft YaHei"/>
+                        </a:defRPr>
+                      </a:pPr>
+                      <a:r>
+                        <a:t>全部</a:t>
+                      </a:r>
+                    </a:p>
+                  </a:txBody>
+                  <a:tcPr>
+                    <a:solidFill>
+                      <a:srgbClr val="FFFFFF"/>
+                    </a:solidFill>
+                  </a:tcPr>
+                </a:tc>
+                <a:tc>
+                  <a:txBody>
+                    <a:bodyPr/>
+                    <a:lstStyle/>
+                    <a:p>
+                      <a:pPr>
+                        <a:defRPr sz="1800">
+                          <a:solidFill>
+                            <a:srgbClr val="17263D"/>
+                          </a:solidFill>
+                          <a:latin typeface="Microsoft YaHei"/>
+                        </a:defRPr>
+                      </a:pPr>
+                      <a:r>
+                        <a:t>372</a:t>
+                      </a:r>
+                    </a:p>
+                  </a:txBody>
+                  <a:tcPr>
+                    <a:solidFill>
+                      <a:srgbClr val="FFFFFF"/>
+                    </a:solidFill>
+                  </a:tcPr>
+                </a:tc>
+                <a:tc>
+                  <a:txBody>
+                    <a:bodyPr/>
+                    <a:lstStyle/>
+                    <a:p>
+                      <a:pPr>
+                        <a:defRPr sz="1800">
+                          <a:solidFill>
+                            <a:srgbClr val="17263D"/>
+                          </a:solidFill>
+                          <a:latin typeface="Microsoft YaHei"/>
+                        </a:defRPr>
+                      </a:pPr>
+                      <a:r>
+                        <a:t>25.62</a:t>
+                      </a:r>
+                    </a:p>
+                  </a:txBody>
+                  <a:tcPr>
+                    <a:solidFill>
+                      <a:srgbClr val="FFFFFF"/>
+                    </a:solidFill>
+                  </a:tcPr>
+                </a:tc>
+                <a:tc>
+                  <a:txBody>
+                    <a:bodyPr/>
+                    <a:lstStyle/>
+                    <a:p>
+                      <a:pPr>
+                        <a:defRPr sz="1800">
+                          <a:solidFill>
+                            <a:srgbClr val="17263D"/>
+                          </a:solidFill>
+                          <a:latin typeface="Microsoft YaHei"/>
+                        </a:defRPr>
+                      </a:pPr>
+                      <a:r>
+                        <a:t>7.63</a:t>
+                      </a:r>
+                    </a:p>
+                  </a:txBody>
+                  <a:tcPr>
+                    <a:solidFill>
+                      <a:srgbClr val="FFFFFF"/>
+                    </a:solidFill>
+                  </a:tcPr>
+                </a:tc>
+              </a:tr>
+              <a:tr h="617220">
+                <a:tc>
+                  <a:txBody>
+                    <a:bodyPr/>
+                    <a:lstStyle/>
+                    <a:p>
+                      <a:pPr>
+                        <a:defRPr sz="1800">
+                          <a:solidFill>
+                            <a:srgbClr val="17263D"/>
+                          </a:solidFill>
+                          <a:latin typeface="Microsoft YaHei"/>
+                        </a:defRPr>
+                      </a:pPr>
+                      <a:r>
+                        <a:t>左手</a:t>
+                      </a:r>
+                    </a:p>
+                  </a:txBody>
+                  <a:tcPr>
+                    <a:solidFill>
+                      <a:srgbClr val="E8EEF5"/>
+                    </a:solidFill>
+                  </a:tcPr>
+                </a:tc>
+                <a:tc>
+                  <a:txBody>
+                    <a:bodyPr/>
+                    <a:lstStyle/>
+                    <a:p>
+                      <a:pPr>
+                        <a:defRPr sz="1800">
+                          <a:solidFill>
+                            <a:srgbClr val="17263D"/>
+                          </a:solidFill>
+                          <a:latin typeface="Microsoft YaHei"/>
+                        </a:defRPr>
+                      </a:pPr>
+                      <a:r>
+                        <a:t>159</a:t>
+                      </a:r>
+                    </a:p>
+                  </a:txBody>
+                  <a:tcPr>
+                    <a:solidFill>
+                      <a:srgbClr val="E8EEF5"/>
+                    </a:solidFill>
+                  </a:tcPr>
+                </a:tc>
+                <a:tc>
+                  <a:txBody>
+                    <a:bodyPr/>
+                    <a:lstStyle/>
+                    <a:p>
+                      <a:pPr>
+                        <a:defRPr sz="1800">
+                          <a:solidFill>
+                            <a:srgbClr val="17263D"/>
+                          </a:solidFill>
+                          <a:latin typeface="Microsoft YaHei"/>
+                        </a:defRPr>
+                      </a:pPr>
+                      <a:r>
+                        <a:t>24.81</a:t>
+                      </a:r>
+                    </a:p>
+                  </a:txBody>
+                  <a:tcPr>
+                    <a:solidFill>
+                      <a:srgbClr val="E8EEF5"/>
+                    </a:solidFill>
+                  </a:tcPr>
+                </a:tc>
+                <a:tc>
+                  <a:txBody>
+                    <a:bodyPr/>
+                    <a:lstStyle/>
+                    <a:p>
+                      <a:pPr>
+                        <a:defRPr sz="1800">
+                          <a:solidFill>
+                            <a:srgbClr val="17263D"/>
+                          </a:solidFill>
+                          <a:latin typeface="Microsoft YaHei"/>
+                        </a:defRPr>
+                      </a:pPr>
+                      <a:r>
+                        <a:t>8.13</a:t>
+                      </a:r>
+                    </a:p>
+                  </a:txBody>
+                  <a:tcPr>
+                    <a:solidFill>
+                      <a:srgbClr val="E8EEF5"/>
+                    </a:solidFill>
+                  </a:tcPr>
+                </a:tc>
+              </a:tr>
+              <a:tr h="617220">
+                <a:tc>
+                  <a:txBody>
+                    <a:bodyPr/>
+                    <a:lstStyle/>
+                    <a:p>
+                      <a:pPr>
+                        <a:defRPr sz="1800">
+                          <a:solidFill>
+                            <a:srgbClr val="17263D"/>
+                          </a:solidFill>
+                          <a:latin typeface="Microsoft YaHei"/>
+                        </a:defRPr>
+                      </a:pPr>
+                      <a:r>
+                        <a:t>右手</a:t>
+                      </a:r>
+                    </a:p>
+                  </a:txBody>
+                  <a:tcPr>
+                    <a:solidFill>
+                      <a:srgbClr val="FFFFFF"/>
+                    </a:solidFill>
+                  </a:tcPr>
+                </a:tc>
+                <a:tc>
+                  <a:txBody>
+                    <a:bodyPr/>
+                    <a:lstStyle/>
+                    <a:p>
+                      <a:pPr>
+                        <a:defRPr sz="1800">
+                          <a:solidFill>
+                            <a:srgbClr val="17263D"/>
+                          </a:solidFill>
+                          <a:latin typeface="Microsoft YaHei"/>
+                        </a:defRPr>
+                      </a:pPr>
+                      <a:r>
+                        <a:t>213</a:t>
+                      </a:r>
+                    </a:p>
+                  </a:txBody>
+                  <a:tcPr>
+                    <a:solidFill>
+                      <a:srgbClr val="FFFFFF"/>
+                    </a:solidFill>
+                  </a:tcPr>
+                </a:tc>
+                <a:tc>
+                  <a:txBody>
+                    <a:bodyPr/>
+                    <a:lstStyle/>
+                    <a:p>
+                      <a:pPr>
+                        <a:defRPr sz="1800">
+                          <a:solidFill>
+                            <a:srgbClr val="17263D"/>
+                          </a:solidFill>
+                          <a:latin typeface="Microsoft YaHei"/>
+                        </a:defRPr>
+                      </a:pPr>
+                      <a:r>
+                        <a:t>26.22</a:t>
+                      </a:r>
+                    </a:p>
+                  </a:txBody>
+                  <a:tcPr>
+                    <a:solidFill>
+                      <a:srgbClr val="FFFFFF"/>
+                    </a:solidFill>
+                  </a:tcPr>
+                </a:tc>
+                <a:tc>
+                  <a:txBody>
+                    <a:bodyPr/>
+                    <a:lstStyle/>
+                    <a:p>
+                      <a:pPr>
+                        <a:defRPr sz="1800">
+                          <a:solidFill>
+                            <a:srgbClr val="17263D"/>
+                          </a:solidFill>
+                          <a:latin typeface="Microsoft YaHei"/>
+                        </a:defRPr>
+                      </a:pPr>
+                      <a:r>
+                        <a:t>7.26</a:t>
+                      </a:r>
+                    </a:p>
+                  </a:txBody>
+                  <a:tcPr>
+                    <a:solidFill>
+                      <a:srgbClr val="FFFFFF"/>
+                    </a:solidFill>
+                  </a:tcPr>
+                </a:tc>
+              </a:tr>
+            </a:tbl>
+          </a:graphicData>
+        </a:graphic>
+      </p:graphicFrame>
+      <p:sp>
+        <p:nvSpPr>
+          <p:cNvPr id="7" name="TextBox 6"/>
+          <p:cNvSpPr txBox="1"/>
+          <p:nvPr/>
+        </p:nvSpPr>
+        <p:spPr>
+          <a:xfrm>
+            <a:off x="594360" y="4206240"/>
+            <a:ext cx="10972800" cy="1645920"/>
+          </a:xfrm>
+          <a:prstGeom prst="rect">
+            <a:avLst/>
+          </a:prstGeom>
+          <a:noFill/>
+        </p:spPr>
+        <p:txBody>
+          <a:bodyPr wrap="square">
+            <a:spAutoFit/>
+          </a:bodyPr>
+          <a:lstStyle/>
+          <a:p>
+            <a:pPr>
+              <a:defRPr sz="1800" b="0">
+                <a:solidFill>
+                  <a:srgbClr val="17263D"/>
+                </a:solidFill>
+                <a:latin typeface="Microsoft YaHei"/>
+              </a:defRPr>
+            </a:pPr>
+            <a:r>
+              <a:t>MPJPE仅对齐腕部；PA额外对齐旋转、尺度和平移。</a:t>
+            </a:r>
+          </a:p>
+          <a:p>
+            <a:pPr>
+              <a:defRPr sz="1800" b="0">
+                <a:solidFill>
+                  <a:srgbClr val="17263D"/>
+                </a:solidFill>
+                <a:latin typeface="Microsoft YaHei"/>
+              </a:defRPr>
+            </a:pPr>
+            <a:r>
+              <a:t>MPJPE中位数19.82 mm；18/372个样本超过50 mm，最大176.34 mm。</a:t>
+            </a:r>
+          </a:p>
+          <a:p>
+            <a:pPr>
+              <a:defRPr sz="1800" b="0">
+                <a:solidFill>
+                  <a:srgbClr val="17263D"/>
+                </a:solidFill>
+                <a:latin typeface="Microsoft YaHei"/>
+              </a:defRPr>
+            </a:pPr>
+            <a:r>
+              <a:t>2D重投影误差15.68 px（256px裁剪坐标）；本评测不含检测器性能。</a:t>
+            </a:r>
+          </a:p>
+          <a:p>
+            <a:pPr>
+              <a:defRPr sz="1800" b="0">
+                <a:solidFill>
+                  <a:srgbClr val="17263D"/>
+                </a:solidFill>
+                <a:latin typeface="Microsoft YaHei"/>
+              </a:defRPr>
+            </a:pPr>
+            <a:r>
+              <a:t>下一步：小样本试训，并用同一验证集比较微调前后。</a:t>
+            </a:r>
+          </a:p>
+        </p:txBody>
+      </p:sp>
+    </p:spTree>
+  </p:cSld>
+  <p:clrMapOvr>
+    <a:masterClrMapping/>
+  </p:clrMapOvr>
+</p:sld>
+</file>
+
+<file path=ppt/slides/slide38.xml><?xml version="1.0" encoding="utf-8"?>
+<p:sld xmlns:a="http://schemas.openxmlformats.org/drawingml/2006/main" xmlns:p="http://schemas.openxmlformats.org/presentationml/2006/main" xmlns:r="http://schemas.openxmlformats.org/officeDocument/2006/relationships">
+  <p:cSld>
+    <p:bg>
+      <p:bgPr>
+        <a:solidFill>
+          <a:srgbClr val="F4F7FB"/>
+        </a:solidFill>
+        <a:effectLst/>
+      </p:bgPr>
+    </p:bg>
+    <p:spTree>
+      <p:nvGrpSpPr>
+        <p:cNvPr id="1" name=""/>
+        <p:cNvGrpSpPr/>
+        <p:nvPr/>
+      </p:nvGrpSpPr>
+      <p:grpSpPr/>
+      <p:sp>
+        <p:nvSpPr>
+          <p:cNvPr id="2" name="TextBox 1"/>
+          <p:cNvSpPr txBox="1"/>
+          <p:nvPr/>
+        </p:nvSpPr>
+        <p:spPr>
+          <a:xfrm>
+            <a:off x="457200" y="228600"/>
+            <a:ext cx="11247120" cy="548640"/>
+          </a:xfrm>
+          <a:prstGeom prst="rect">
+            <a:avLst/>
+          </a:prstGeom>
+          <a:noFill/>
+        </p:spPr>
+        <p:txBody>
+          <a:bodyPr wrap="square">
+            <a:spAutoFit/>
+          </a:bodyPr>
+          <a:lstStyle/>
+          <a:p>
+            <a:pPr>
+              <a:defRPr sz="2700" b="1">
+                <a:solidFill>
+                  <a:srgbClr val="17263D"/>
+                </a:solidFill>
+                <a:latin typeface="Microsoft YaHei"/>
+              </a:defRPr>
+            </a:pPr>
+            <a:r>
+              <a:t>手套基线｜预测对照</a:t>
+            </a:r>
+          </a:p>
+        </p:txBody>
+      </p:sp>
+      <p:sp>
+        <p:nvSpPr>
+          <p:cNvPr id="3" name="TextBox 2"/>
+          <p:cNvSpPr txBox="1"/>
+          <p:nvPr/>
+        </p:nvSpPr>
+        <p:spPr>
+          <a:xfrm>
+            <a:off x="457200" y="896112"/>
+            <a:ext cx="11247120" cy="457200"/>
+          </a:xfrm>
+          <a:prstGeom prst="rect">
+            <a:avLst/>
+          </a:prstGeom>
+          <a:noFill/>
+        </p:spPr>
+        <p:txBody>
+          <a:bodyPr wrap="square">
+            <a:spAutoFit/>
+          </a:bodyPr>
+          <a:lstStyle/>
+          <a:p>
+            <a:pPr>
+              <a:defRPr sz="1500" b="0">
+                <a:solidFill>
+                  <a:srgbClr val="52637A"/>
+                </a:solidFill>
+                <a:latin typeface="Microsoft YaHei"/>
+              </a:defRPr>
+            </a:pPr>
+            <a:r>
+              <a:t>每个小图：原图 ｜ 绿色参考标注 ｜ 红色官方预测</a:t>
+            </a:r>
+          </a:p>
+        </p:txBody>
+      </p:sp>
+      <p:sp>
+        <p:nvSpPr>
+          <p:cNvPr id="4" name="TextBox 3"/>
+          <p:cNvSpPr txBox="1"/>
+          <p:nvPr/>
+        </p:nvSpPr>
+        <p:spPr>
+          <a:xfrm>
+            <a:off x="457200" y="6455664"/>
+            <a:ext cx="10789920" cy="274320"/>
+          </a:xfrm>
+          <a:prstGeom prst="rect">
+            <a:avLst/>
+          </a:prstGeom>
+          <a:noFill/>
+        </p:spPr>
+        <p:txBody>
+          <a:bodyPr wrap="square">
+            <a:spAutoFit/>
+          </a:bodyPr>
+          <a:lstStyle/>
+          <a:p>
+            <a:pPr>
+              <a:defRPr sz="1000" b="0">
+                <a:solidFill>
+                  <a:srgbClr val="007E87"/>
+                </a:solidFill>
+                <a:latin typeface="Microsoft YaHei"/>
+              </a:defRPr>
+            </a:pPr>
+            <a:r>
+              <a:t>来源：evaluation/ego_clinical_official_baseline/metrics.json、per_sample.csv 与预测对照图</a:t>
+            </a:r>
+          </a:p>
+        </p:txBody>
+      </p:sp>
+      <p:sp>
+        <p:nvSpPr>
+          <p:cNvPr id="5" name="TextBox 4"/>
+          <p:cNvSpPr txBox="1"/>
+          <p:nvPr/>
+        </p:nvSpPr>
+        <p:spPr>
+          <a:xfrm>
+            <a:off x="11247120" y="6455664"/>
+            <a:ext cx="457200" cy="274320"/>
+          </a:xfrm>
+          <a:prstGeom prst="rect">
+            <a:avLst/>
+          </a:prstGeom>
+          <a:noFill/>
+        </p:spPr>
+        <p:txBody>
+          <a:bodyPr wrap="square">
+            <a:spAutoFit/>
+          </a:bodyPr>
+          <a:lstStyle/>
+          <a:p>
+            <a:pPr>
+              <a:defRPr sz="1100" b="0">
+                <a:solidFill>
+                  <a:srgbClr val="17263D"/>
+                </a:solidFill>
+                <a:latin typeface="Microsoft YaHei"/>
+              </a:defRPr>
+            </a:pPr>
+            <a:r>
+              <a:t>38</a:t>
+            </a:r>
+          </a:p>
+        </p:txBody>
+      </p:sp>
+      <p:pic>
+        <p:nvPicPr>
+          <p:cNvPr id="6" name="Picture 5" descr="image.png"/>
+          <p:cNvPicPr>
+            <a:picLocks noChangeAspect="1"/>
+          </p:cNvPicPr>
+          <p:nvPr/>
+        </p:nvPicPr>
+        <p:blipFill>
+          <a:blip r:embed="rId3"/>
+          <a:stretch>
+            <a:fillRect/>
+          </a:stretch>
+        </p:blipFill>
+        <p:spPr>
+          <a:xfrm>
+            <a:off x="502920" y="1554480"/>
+            <a:ext cx="5532120" cy="1844040"/>
+          </a:xfrm>
+          <a:prstGeom prst="rect">
+            <a:avLst/>
+          </a:prstGeom>
+        </p:spPr>
+      </p:pic>
+      <p:pic>
+        <p:nvPicPr>
+          <p:cNvPr id="7" name="Picture 6" descr="image.png"/>
+          <p:cNvPicPr>
+            <a:picLocks noChangeAspect="1"/>
+          </p:cNvPicPr>
+          <p:nvPr/>
+        </p:nvPicPr>
+        <p:blipFill>
+          <a:blip r:embed="rId4"/>
+          <a:stretch>
+            <a:fillRect/>
+          </a:stretch>
+        </p:blipFill>
+        <p:spPr>
+          <a:xfrm>
+            <a:off x="6172200" y="1554480"/>
+            <a:ext cx="5532120" cy="1844040"/>
+          </a:xfrm>
+          <a:prstGeom prst="rect">
+            <a:avLst/>
+          </a:prstGeom>
+        </p:spPr>
+      </p:pic>
+      <p:pic>
+        <p:nvPicPr>
+          <p:cNvPr id="8" name="Picture 7" descr="image.png"/>
+          <p:cNvPicPr>
+            <a:picLocks noChangeAspect="1"/>
+          </p:cNvPicPr>
+          <p:nvPr/>
+        </p:nvPicPr>
+        <p:blipFill>
+          <a:blip r:embed="rId5"/>
+          <a:stretch>
+            <a:fillRect/>
+          </a:stretch>
+        </p:blipFill>
+        <p:spPr>
+          <a:xfrm>
+            <a:off x="502920" y="3520439"/>
+            <a:ext cx="5532120" cy="1844040"/>
+          </a:xfrm>
+          <a:prstGeom prst="rect">
+            <a:avLst/>
+          </a:prstGeom>
+        </p:spPr>
+      </p:pic>
+      <p:pic>
+        <p:nvPicPr>
+          <p:cNvPr id="9" name="Picture 8" descr="image.png"/>
+          <p:cNvPicPr>
+            <a:picLocks noChangeAspect="1"/>
+          </p:cNvPicPr>
+          <p:nvPr/>
+        </p:nvPicPr>
+        <p:blipFill>
+          <a:blip r:embed="rId6"/>
+          <a:stretch>
+            <a:fillRect/>
+          </a:stretch>
+        </p:blipFill>
+        <p:spPr>
+          <a:xfrm>
+            <a:off x="6172200" y="3520439"/>
+            <a:ext cx="5532120" cy="1844040"/>
+          </a:xfrm>
+          <a:prstGeom prst="rect">
+            <a:avLst/>
+          </a:prstGeom>
+        </p:spPr>
+      </p:pic>
+      <p:sp>
+        <p:nvSpPr>
+          <p:cNvPr id="10" name="TextBox 9"/>
+          <p:cNvSpPr txBox="1"/>
+          <p:nvPr/>
+        </p:nvSpPr>
+        <p:spPr>
+          <a:xfrm>
+            <a:off x="548640" y="5715000"/>
+            <a:ext cx="11064240" cy="594360"/>
+          </a:xfrm>
+          <a:prstGeom prst="rect">
+            <a:avLst/>
+          </a:prstGeom>
+          <a:noFill/>
+        </p:spPr>
+        <p:txBody>
+          <a:bodyPr wrap="square">
+            <a:spAutoFit/>
+          </a:bodyPr>
+          <a:lstStyle/>
+          <a:p>
+            <a:pPr>
+              <a:defRPr sz="1700" b="0">
+                <a:solidFill>
+                  <a:srgbClr val="007E87"/>
+                </a:solidFill>
+                <a:latin typeface="Microsoft YaHei"/>
+              </a:defRPr>
+            </a:pPr>
+            <a:r>
+              <a:t>展示均匀抽样预览中的4例；预测可视化没有做PA对齐。</a:t>
+            </a:r>
+          </a:p>
+        </p:txBody>
+      </p:sp>
+    </p:spTree>
+  </p:cSld>
+  <p:clrMapOvr>
+    <a:masterClrMapping/>
+  </p:clrMapOvr>
+</p:sld>
+</file>
+
+<file path=ppt/slides/slide39.xml><?xml version="1.0" encoding="utf-8"?>
+<p:sld xmlns:a="http://schemas.openxmlformats.org/drawingml/2006/main" xmlns:p="http://schemas.openxmlformats.org/presentationml/2006/main" xmlns:r="http://schemas.openxmlformats.org/officeDocument/2006/relationships">
+  <p:cSld>
+    <p:bg>
+      <p:bgPr>
+        <a:solidFill>
+          <a:srgbClr val="F4F7FB"/>
+        </a:solidFill>
+        <a:effectLst/>
+      </p:bgPr>
+    </p:bg>
+    <p:spTree>
+      <p:nvGrpSpPr>
+        <p:cNvPr id="1" name=""/>
+        <p:cNvGrpSpPr/>
+        <p:nvPr/>
+      </p:nvGrpSpPr>
+      <p:grpSpPr/>
+      <p:sp>
+        <p:nvSpPr>
+          <p:cNvPr id="2" name="TextBox 1"/>
+          <p:cNvSpPr txBox="1"/>
+          <p:nvPr/>
+        </p:nvSpPr>
+        <p:spPr>
+          <a:xfrm>
+            <a:off x="457200" y="228600"/>
+            <a:ext cx="11247120" cy="548640"/>
+          </a:xfrm>
+          <a:prstGeom prst="rect">
+            <a:avLst/>
+          </a:prstGeom>
+          <a:noFill/>
+        </p:spPr>
+        <p:txBody>
+          <a:bodyPr wrap="square">
+            <a:spAutoFit/>
+          </a:bodyPr>
+          <a:lstStyle/>
+          <a:p>
+            <a:pPr>
+              <a:defRPr sz="2700" b="1">
+                <a:solidFill>
+                  <a:srgbClr val="17263D"/>
+                </a:solidFill>
+                <a:latin typeface="Microsoft YaHei"/>
+              </a:defRPr>
+            </a:pPr>
+            <a:r>
+              <a:t>手套基线｜失败案例</a:t>
+            </a:r>
+          </a:p>
+        </p:txBody>
+      </p:sp>
+      <p:sp>
+        <p:nvSpPr>
+          <p:cNvPr id="3" name="TextBox 2"/>
+          <p:cNvSpPr txBox="1"/>
+          <p:nvPr/>
+        </p:nvSpPr>
+        <p:spPr>
+          <a:xfrm>
+            <a:off x="457200" y="896112"/>
+            <a:ext cx="11247120" cy="457200"/>
+          </a:xfrm>
+          <a:prstGeom prst="rect">
+            <a:avLst/>
+          </a:prstGeom>
+          <a:noFill/>
+        </p:spPr>
+        <p:txBody>
+          <a:bodyPr wrap="square">
+            <a:spAutoFit/>
+          </a:bodyPr>
+          <a:lstStyle/>
+          <a:p>
+            <a:pPr>
+              <a:defRPr sz="1500" b="0">
+                <a:solidFill>
+                  <a:srgbClr val="52637A"/>
+                </a:solidFill>
+                <a:latin typeface="Microsoft YaHei"/>
+              </a:defRPr>
+            </a:pPr>
+            <a:r>
+              <a:t>每个小图：原图 ｜ 绿色参考标注 ｜ 红色官方预测</a:t>
+            </a:r>
+          </a:p>
+        </p:txBody>
+      </p:sp>
+      <p:sp>
+        <p:nvSpPr>
+          <p:cNvPr id="4" name="TextBox 3"/>
+          <p:cNvSpPr txBox="1"/>
+          <p:nvPr/>
+        </p:nvSpPr>
+        <p:spPr>
+          <a:xfrm>
+            <a:off x="457200" y="6455664"/>
+            <a:ext cx="10789920" cy="274320"/>
+          </a:xfrm>
+          <a:prstGeom prst="rect">
+            <a:avLst/>
+          </a:prstGeom>
+          <a:noFill/>
+        </p:spPr>
+        <p:txBody>
+          <a:bodyPr wrap="square">
+            <a:spAutoFit/>
+          </a:bodyPr>
+          <a:lstStyle/>
+          <a:p>
+            <a:pPr>
+              <a:defRPr sz="1000" b="0">
+                <a:solidFill>
+                  <a:srgbClr val="007E87"/>
+                </a:solidFill>
+                <a:latin typeface="Microsoft YaHei"/>
+              </a:defRPr>
+            </a:pPr>
+            <a:r>
+              <a:t>来源：evaluation/ego_clinical_official_baseline/metrics.json、per_sample.csv 与预测对照图</a:t>
+            </a:r>
+          </a:p>
+        </p:txBody>
+      </p:sp>
+      <p:sp>
+        <p:nvSpPr>
+          <p:cNvPr id="5" name="TextBox 4"/>
+          <p:cNvSpPr txBox="1"/>
+          <p:nvPr/>
+        </p:nvSpPr>
+        <p:spPr>
+          <a:xfrm>
+            <a:off x="11247120" y="6455664"/>
+            <a:ext cx="457200" cy="274320"/>
+          </a:xfrm>
+          <a:prstGeom prst="rect">
+            <a:avLst/>
+          </a:prstGeom>
+          <a:noFill/>
+        </p:spPr>
+        <p:txBody>
+          <a:bodyPr wrap="square">
+            <a:spAutoFit/>
+          </a:bodyPr>
+          <a:lstStyle/>
+          <a:p>
+            <a:pPr>
+              <a:defRPr sz="1100" b="0">
+                <a:solidFill>
+                  <a:srgbClr val="17263D"/>
+                </a:solidFill>
+                <a:latin typeface="Microsoft YaHei"/>
+              </a:defRPr>
+            </a:pPr>
+            <a:r>
+              <a:t>39</a:t>
+            </a:r>
+          </a:p>
+        </p:txBody>
+      </p:sp>
+      <p:pic>
+        <p:nvPicPr>
+          <p:cNvPr id="6" name="Picture 5" descr="image.png"/>
+          <p:cNvPicPr>
+            <a:picLocks noChangeAspect="1"/>
+          </p:cNvPicPr>
+          <p:nvPr/>
+        </p:nvPicPr>
+        <p:blipFill>
+          <a:blip r:embed="rId3"/>
+          <a:stretch>
+            <a:fillRect/>
+          </a:stretch>
+        </p:blipFill>
+        <p:spPr>
+          <a:xfrm>
+            <a:off x="502920" y="1554480"/>
+            <a:ext cx="5532120" cy="1844040"/>
+          </a:xfrm>
+          <a:prstGeom prst="rect">
+            <a:avLst/>
+          </a:prstGeom>
+        </p:spPr>
+      </p:pic>
+      <p:pic>
+        <p:nvPicPr>
+          <p:cNvPr id="7" name="Picture 6" descr="image.png"/>
+          <p:cNvPicPr>
+            <a:picLocks noChangeAspect="1"/>
+          </p:cNvPicPr>
+          <p:nvPr/>
+        </p:nvPicPr>
+        <p:blipFill>
+          <a:blip r:embed="rId4"/>
+          <a:stretch>
+            <a:fillRect/>
+          </a:stretch>
+        </p:blipFill>
+        <p:spPr>
+          <a:xfrm>
+            <a:off x="6172200" y="1554480"/>
+            <a:ext cx="5532120" cy="1844040"/>
+          </a:xfrm>
+          <a:prstGeom prst="rect">
+            <a:avLst/>
+          </a:prstGeom>
+        </p:spPr>
+      </p:pic>
+      <p:pic>
+        <p:nvPicPr>
+          <p:cNvPr id="8" name="Picture 7" descr="image.png"/>
+          <p:cNvPicPr>
+            <a:picLocks noChangeAspect="1"/>
+          </p:cNvPicPr>
+          <p:nvPr/>
+        </p:nvPicPr>
+        <p:blipFill>
+          <a:blip r:embed="rId5"/>
+          <a:stretch>
+            <a:fillRect/>
+          </a:stretch>
+        </p:blipFill>
+        <p:spPr>
+          <a:xfrm>
+            <a:off x="502920" y="3520439"/>
+            <a:ext cx="5532120" cy="1844040"/>
+          </a:xfrm>
+          <a:prstGeom prst="rect">
+            <a:avLst/>
+          </a:prstGeom>
+        </p:spPr>
+      </p:pic>
+      <p:pic>
+        <p:nvPicPr>
+          <p:cNvPr id="9" name="Picture 8" descr="image.png"/>
+          <p:cNvPicPr>
+            <a:picLocks noChangeAspect="1"/>
+          </p:cNvPicPr>
+          <p:nvPr/>
+        </p:nvPicPr>
+        <p:blipFill>
+          <a:blip r:embed="rId6"/>
+          <a:stretch>
+            <a:fillRect/>
+          </a:stretch>
+        </p:blipFill>
+        <p:spPr>
+          <a:xfrm>
+            <a:off x="6172200" y="3520439"/>
+            <a:ext cx="5532120" cy="1844040"/>
+          </a:xfrm>
+          <a:prstGeom prst="rect">
+            <a:avLst/>
+          </a:prstGeom>
+        </p:spPr>
+      </p:pic>
+      <p:sp>
+        <p:nvSpPr>
+          <p:cNvPr id="10" name="TextBox 9"/>
+          <p:cNvSpPr txBox="1"/>
+          <p:nvPr/>
+        </p:nvSpPr>
+        <p:spPr>
+          <a:xfrm>
+            <a:off x="548640" y="5715000"/>
+            <a:ext cx="11064240" cy="594360"/>
+          </a:xfrm>
+          <a:prstGeom prst="rect">
+            <a:avLst/>
+          </a:prstGeom>
+          <a:noFill/>
+        </p:spPr>
+        <p:txBody>
+          <a:bodyPr wrap="square">
+            <a:spAutoFit/>
+          </a:bodyPr>
+          <a:lstStyle/>
+          <a:p>
+            <a:pPr>
+              <a:defRPr sz="1700" b="0">
+                <a:solidFill>
+                  <a:srgbClr val="007E87"/>
+                </a:solidFill>
+                <a:latin typeface="Microsoft YaHei"/>
+              </a:defRPr>
+            </a:pPr>
+            <a:r>
+              <a:t>展示MPJPE最高6例中的4例；低PA误差可能掩盖方向或尺度错误。</a:t>
             </a:r>
           </a:p>
         </p:txBody>
